--- a/docs/Indus11-Review2.pptx
+++ b/docs/Indus11-Review2.pptx
@@ -20,6 +20,7 @@
     <p:sldId id="262" r:id="rId14"/>
     <p:sldId id="263" r:id="rId15"/>
     <p:sldId id="264" r:id="rId16"/>
+    <p:sldId id="269" r:id="rId21"/>
     <p:sldId id="265" r:id="rId17"/>
     <p:sldId id="266" r:id="rId18"/>
     <p:sldId id="267" r:id="rId19"/>
@@ -4673,7 +4674,7 @@
               </a:spcAft>
             </a:pPr>
             <a:r>
-              <a:rPr sz="1600" b="1">
+              <a:rPr sz="1500" b="1">
                 <a:solidFill>
                   <a:srgbClr val="B26A00"/>
                 </a:solidFill>
@@ -4689,13 +4690,13 @@
               </a:spcAft>
             </a:pPr>
             <a:r>
-              <a:rPr sz="1400" b="0">
+              <a:rPr sz="1300" b="0">
                 <a:solidFill>
                   <a:srgbClr val="222833"/>
                 </a:solidFill>
                 <a:latin typeface="Cambria"/>
               </a:rPr>
-              <a:t>Coordinating four data stores locally</a:t>
+              <a:t>Coordinating four data stores on one machine</a:t>
             </a:r>
           </a:p>
           <a:p>
@@ -4705,13 +4706,13 @@
               </a:spcAft>
             </a:pPr>
             <a:r>
-              <a:rPr sz="1400" b="0">
+              <a:rPr sz="1300" b="0">
                 <a:solidFill>
                   <a:srgbClr val="222833"/>
                 </a:solidFill>
                 <a:latin typeface="Cambria"/>
               </a:rPr>
-              <a:t>Keeping LLM output consistent — temp 0 + 30-pt cap</a:t>
+              <a:t>Keeping model output consistent — solved with a 30-point cap</a:t>
             </a:r>
           </a:p>
           <a:p>
@@ -4721,13 +4722,13 @@
               </a:spcAft>
             </a:pPr>
             <a:r>
-              <a:rPr sz="1400" b="0">
+              <a:rPr sz="1300" b="0">
                 <a:solidFill>
                   <a:srgbClr val="222833"/>
                 </a:solidFill>
                 <a:latin typeface="Cambria"/>
               </a:rPr>
-              <a:t>Cypher queries for circular money-mule flows</a:t>
+              <a:t>Writing Cypher queries for circular money-mule flows</a:t>
             </a:r>
           </a:p>
           <a:p>
@@ -4737,13 +4738,45 @@
               </a:spcAft>
             </a:pPr>
             <a:r>
-              <a:rPr sz="1400" b="0">
+              <a:rPr sz="1300" b="0">
                 <a:solidFill>
                   <a:srgbClr val="222833"/>
                 </a:solidFill>
                 <a:latin typeface="Cambria"/>
               </a:rPr>
-              <a:t>Migrating data layer MySQL → MongoDB</a:t>
+              <a:t>Two defects the benchmark exposed: a repeated request returned</a:t>
+            </a:r>
+          </a:p>
+          <a:p>
+            <a:pPr lvl="1">
+              <a:spcAft>
+                <a:spcPts val="400"/>
+              </a:spcAft>
+            </a:pPr>
+            <a:r>
+              <a:rPr sz="1300" b="0">
+                <a:solidFill>
+                  <a:srgbClr val="222833"/>
+                </a:solidFill>
+                <a:latin typeface="Cambria"/>
+              </a:rPr>
+              <a:t>a server error, and a parsing fault silently zeroed the AI</a:t>
+            </a:r>
+          </a:p>
+          <a:p>
+            <a:pPr lvl="1">
+              <a:spcAft>
+                <a:spcPts val="400"/>
+              </a:spcAft>
+            </a:pPr>
+            <a:r>
+              <a:rPr sz="1300" b="0">
+                <a:solidFill>
+                  <a:srgbClr val="222833"/>
+                </a:solidFill>
+                <a:latin typeface="Cambria"/>
+              </a:rPr>
+              <a:t>score — both fixed and covered by tests</a:t>
             </a:r>
           </a:p>
         </p:txBody>
@@ -4769,7 +4802,7 @@
               </a:spcAft>
             </a:pPr>
             <a:r>
-              <a:rPr sz="1600" b="1">
+              <a:rPr sz="1500" b="1">
                 <a:solidFill>
                   <a:srgbClr val="2E7D32"/>
                 </a:solidFill>
@@ -4785,13 +4818,13 @@
               </a:spcAft>
             </a:pPr>
             <a:r>
-              <a:rPr sz="1400" b="0">
+              <a:rPr sz="1300" b="0">
                 <a:solidFill>
                   <a:srgbClr val="222833"/>
                 </a:solidFill>
                 <a:latin typeface="Cambria"/>
               </a:rPr>
-              <a:t>Measure accuracy — precision / recall</a:t>
+              <a:t>Resolve the block-threshold trade-off from recorded scores</a:t>
             </a:r>
           </a:p>
           <a:p>
@@ -4801,13 +4834,13 @@
               </a:spcAft>
             </a:pPr>
             <a:r>
-              <a:rPr sz="1400" b="0">
+              <a:rPr sz="1300" b="0">
                 <a:solidFill>
                   <a:srgbClr val="222833"/>
                 </a:solidFill>
                 <a:latin typeface="Cambria"/>
               </a:rPr>
-              <a:t>Train a supervised model as 4th signal</a:t>
+              <a:t>Add API authentication and request logging</a:t>
             </a:r>
           </a:p>
           <a:p>
@@ -4817,13 +4850,13 @@
               </a:spcAft>
             </a:pPr>
             <a:r>
-              <a:rPr sz="1400" b="0">
+              <a:rPr sz="1300" b="0">
                 <a:solidFill>
                   <a:srgbClr val="222833"/>
                 </a:solidFill>
                 <a:latin typeface="Cambria"/>
               </a:rPr>
-              <a:t>Fraud-ring visualisation in the dashboard</a:t>
+              <a:t>Fraud-ring visualisation on the graph endpoint</a:t>
             </a:r>
           </a:p>
           <a:p>
@@ -4833,13 +4866,13 @@
               </a:spcAft>
             </a:pPr>
             <a:r>
-              <a:rPr sz="1400" b="0">
+              <a:rPr sz="1300" b="0">
                 <a:solidFill>
                   <a:srgbClr val="222833"/>
                 </a:solidFill>
                 <a:latin typeface="Cambria"/>
               </a:rPr>
-              <a:t>Harden the API — auth, encryption, load test</a:t>
+              <a:t>Investigate the 7 undetected frauds; fan-in / fan-out patterns</a:t>
             </a:r>
           </a:p>
           <a:p>
@@ -4849,13 +4882,29 @@
               </a:spcAft>
             </a:pPr>
             <a:r>
-              <a:rPr sz="1400" b="0">
+              <a:rPr sz="1300" b="0">
                 <a:solidFill>
                   <a:srgbClr val="222833"/>
                 </a:solidFill>
                 <a:latin typeface="Cambria"/>
               </a:rPr>
-              <a:t>Complete the SRS and final report</a:t>
+              <a:t>Train a supervised classifier as a fourth signal</a:t>
+            </a:r>
+          </a:p>
+          <a:p>
+            <a:pPr lvl="1">
+              <a:spcAft>
+                <a:spcPts val="400"/>
+              </a:spcAft>
+            </a:pPr>
+            <a:r>
+              <a:rPr sz="1300" b="0">
+                <a:solidFill>
+                  <a:srgbClr val="222833"/>
+                </a:solidFill>
+                <a:latin typeface="Cambria"/>
+              </a:rPr>
+              <a:t>Reduce latency, presently dominated by the local model</a:t>
             </a:r>
           </a:p>
         </p:txBody>
@@ -4941,48 +4990,14 @@
       </p:sp>
       <p:sp>
         <p:nvSpPr>
-          <p:cNvPr id="3" name="TextBox 2"/>
-          <p:cNvSpPr txBox="1"/>
+          <p:cNvPr id="3" name="Rounded Rectangle 2"/>
+          <p:cNvSpPr/>
           <p:nvPr/>
         </p:nvSpPr>
         <p:spPr>
           <a:xfrm>
-            <a:off x="18288" y="109728"/>
-            <a:ext cx="8229600" cy="292608"/>
-          </a:xfrm>
-          <a:prstGeom prst="rect">
-            <a:avLst/>
-          </a:prstGeom>
-          <a:noFill/>
-        </p:spPr>
-        <p:txBody>
-          <a:bodyPr wrap="none">
-            <a:spAutoFit/>
-          </a:bodyPr>
-          <a:lstStyle/>
-          <a:p>
-            <a:r>
-              <a:rPr sz="1100" b="1">
-                <a:solidFill>
-                  <a:srgbClr val="028090"/>
-                </a:solidFill>
-                <a:latin typeface="Cambria"/>
-              </a:rPr>
-              <a:t>08 · CONCLUSION</a:t>
-            </a:r>
-          </a:p>
-        </p:txBody>
-      </p:sp>
-      <p:sp>
-        <p:nvSpPr>
-          <p:cNvPr id="4" name="Rounded Rectangle 3"/>
-          <p:cNvSpPr/>
-          <p:nvPr/>
-        </p:nvSpPr>
-        <p:spPr>
-          <a:xfrm>
-            <a:off x="457200" y="1920240"/>
-            <a:ext cx="2743200" cy="2743200"/>
+            <a:off x="457200" y="1828800"/>
+            <a:ext cx="2743200" cy="2834640"/>
           </a:xfrm>
           <a:prstGeom prst="roundRect">
             <a:avLst/>
@@ -4990,7 +5005,7 @@
           <a:solidFill>
             <a:srgbClr val="F4F6FA"/>
           </a:solidFill>
-          <a:ln w="12700">
+          <a:ln>
             <a:solidFill>
               <a:srgbClr val="C7D0DE"/>
             </a:solidFill>
@@ -5012,10 +5027,10 @@
           </a:fontRef>
         </p:style>
         <p:txBody>
-          <a:bodyPr rtlCol="0" anchor="t" wrap="square" lIns="146304" rIns="128016" tIns="182880"/>
-          <a:lstStyle/>
-          <a:p>
-            <a:pPr algn="l">
+          <a:bodyPr rtlCol="0" anchor="ctr" wrap="square" lIns="146304" rIns="128016" tIns="182880"/>
+          <a:lstStyle/>
+          <a:p>
+            <a:pPr algn="ctr">
               <a:spcAft>
                 <a:spcPts val="800"/>
               </a:spcAft>
@@ -5027,13 +5042,13 @@
                 </a:solidFill>
                 <a:latin typeface="Cambria"/>
               </a:rPr>
-              <a:t>A working end-to-end prototype</a:t>
-            </a:r>
-          </a:p>
-          <a:p>
-            <a:pPr algn="l">
+              <a:t>Measured, not asserted</a:t>
+            </a:r>
+          </a:p>
+          <a:p>
+            <a:pPr>
               <a:spcAft>
-                <a:spcPts val="400"/>
+                <a:spcPts val="800"/>
               </a:spcAft>
             </a:pPr>
             <a:r>
@@ -5043,21 +5058,21 @@
                 </a:solidFill>
                 <a:latin typeface="Cambria"/>
               </a:rPr>
-              <a:t>All five layers run together and score real transactions.</a:t>
-            </a:r>
-          </a:p>
-        </p:txBody>
-      </p:sp>
-      <p:sp>
-        <p:nvSpPr>
-          <p:cNvPr id="5" name="Rounded Rectangle 4"/>
+              <a:t>93.8% precision, 86.5% recall, F1 0.90 on 208 labelled transactions.</a:t>
+            </a:r>
+          </a:p>
+        </p:txBody>
+      </p:sp>
+      <p:sp>
+        <p:nvSpPr>
+          <p:cNvPr id="4" name="Rounded Rectangle 3"/>
           <p:cNvSpPr/>
           <p:nvPr/>
         </p:nvSpPr>
         <p:spPr>
           <a:xfrm>
-            <a:off x="3447288" y="1920240"/>
-            <a:ext cx="2743200" cy="2743200"/>
+            <a:off x="3447288" y="1828800"/>
+            <a:ext cx="2743200" cy="2834640"/>
           </a:xfrm>
           <a:prstGeom prst="roundRect">
             <a:avLst/>
@@ -5065,7 +5080,7 @@
           <a:solidFill>
             <a:srgbClr val="F4F6FA"/>
           </a:solidFill>
-          <a:ln w="12700">
+          <a:ln>
             <a:solidFill>
               <a:srgbClr val="C7D0DE"/>
             </a:solidFill>
@@ -5087,10 +5102,10 @@
           </a:fontRef>
         </p:style>
         <p:txBody>
-          <a:bodyPr rtlCol="0" anchor="t" wrap="square" lIns="146304" rIns="128016" tIns="182880"/>
-          <a:lstStyle/>
-          <a:p>
-            <a:pPr algn="l">
+          <a:bodyPr rtlCol="0" anchor="ctr" wrap="square" lIns="146304" rIns="128016" tIns="182880"/>
+          <a:lstStyle/>
+          <a:p>
+            <a:pPr algn="ctr">
               <a:spcAft>
                 <a:spcPts val="800"/>
               </a:spcAft>
@@ -5102,13 +5117,13 @@
                 </a:solidFill>
                 <a:latin typeface="Cambria"/>
               </a:rPr>
-              <a:t>Live dashboard + 12 REST APIs</a:t>
-            </a:r>
-          </a:p>
-          <a:p>
-            <a:pPr algn="l">
+              <a:t>The graph layer earns its place</a:t>
+            </a:r>
+          </a:p>
+          <a:p>
+            <a:pPr>
               <a:spcAft>
-                <a:spcPts val="400"/>
+                <a:spcPts val="800"/>
               </a:spcAft>
             </a:pPr>
             <a:r>
@@ -5118,21 +5133,21 @@
                 </a:solidFill>
                 <a:latin typeface="Cambria"/>
               </a:rPr>
-              <a:t>Analysts see decisions, charts, and flagged transactions in real time.</a:t>
-            </a:r>
-          </a:p>
-        </p:txBody>
-      </p:sp>
-      <p:sp>
-        <p:nvSpPr>
-          <p:cNvPr id="6" name="Rounded Rectangle 5"/>
+              <a:t>All 36 planted mule-ring transactions were detected.</a:t>
+            </a:r>
+          </a:p>
+        </p:txBody>
+      </p:sp>
+      <p:sp>
+        <p:nvSpPr>
+          <p:cNvPr id="5" name="Rounded Rectangle 4"/>
           <p:cNvSpPr/>
           <p:nvPr/>
         </p:nvSpPr>
         <p:spPr>
           <a:xfrm>
-            <a:off x="6437376" y="1920240"/>
-            <a:ext cx="2743200" cy="2743200"/>
+            <a:off x="6437376" y="1828800"/>
+            <a:ext cx="2743200" cy="2834640"/>
           </a:xfrm>
           <a:prstGeom prst="roundRect">
             <a:avLst/>
@@ -5140,7 +5155,7 @@
           <a:solidFill>
             <a:srgbClr val="F4F6FA"/>
           </a:solidFill>
-          <a:ln w="12700">
+          <a:ln>
             <a:solidFill>
               <a:srgbClr val="C7D0DE"/>
             </a:solidFill>
@@ -5162,10 +5177,10 @@
           </a:fontRef>
         </p:style>
         <p:txBody>
-          <a:bodyPr rtlCol="0" anchor="t" wrap="square" lIns="146304" rIns="128016" tIns="182880"/>
-          <a:lstStyle/>
-          <a:p>
-            <a:pPr algn="l">
+          <a:bodyPr rtlCol="0" anchor="ctr" wrap="square" lIns="146304" rIns="128016" tIns="182880"/>
+          <a:lstStyle/>
+          <a:p>
+            <a:pPr algn="ctr">
               <a:spcAft>
                 <a:spcPts val="800"/>
               </a:spcAft>
@@ -5173,17 +5188,17 @@
             <a:r>
               <a:rPr sz="1400" b="1">
                 <a:solidFill>
-                  <a:srgbClr val="2E7D32"/>
-                </a:solidFill>
-                <a:latin typeface="Cambria"/>
-              </a:rPr>
-              <a:t>Graph + AI, explained</a:t>
-            </a:r>
-          </a:p>
-          <a:p>
-            <a:pPr algn="l">
+                  <a:srgbClr val="C62828"/>
+                </a:solidFill>
+                <a:latin typeface="Cambria"/>
+              </a:rPr>
+              <a:t>A finding worth reporting</a:t>
+            </a:r>
+          </a:p>
+          <a:p>
+            <a:pPr>
               <a:spcAft>
-                <a:spcPts val="400"/>
+                <a:spcPts val="800"/>
               </a:spcAft>
             </a:pPr>
             <a:r>
@@ -5193,21 +5208,21 @@
                 </a:solidFill>
                 <a:latin typeface="Cambria"/>
               </a:rPr>
-              <a:t>Fraud rings caught by Neo4j; every decision carries a plain-English reason.</a:t>
-            </a:r>
-          </a:p>
-        </p:txBody>
-      </p:sp>
-      <p:sp>
-        <p:nvSpPr>
-          <p:cNvPr id="7" name="Rounded Rectangle 6"/>
+              <a:t>Nothing reaches the block threshold; every catch reaches an analyst.</a:t>
+            </a:r>
+          </a:p>
+        </p:txBody>
+      </p:sp>
+      <p:sp>
+        <p:nvSpPr>
+          <p:cNvPr id="6" name="Rounded Rectangle 5"/>
           <p:cNvSpPr/>
           <p:nvPr/>
         </p:nvSpPr>
         <p:spPr>
           <a:xfrm>
-            <a:off x="9427464" y="1920240"/>
-            <a:ext cx="2743200" cy="2743200"/>
+            <a:off x="9427464" y="1828800"/>
+            <a:ext cx="2743200" cy="2834640"/>
           </a:xfrm>
           <a:prstGeom prst="roundRect">
             <a:avLst/>
@@ -5215,7 +5230,7 @@
           <a:solidFill>
             <a:srgbClr val="F4F6FA"/>
           </a:solidFill>
-          <a:ln w="12700">
+          <a:ln>
             <a:solidFill>
               <a:srgbClr val="C7D0DE"/>
             </a:solidFill>
@@ -5237,10 +5252,10 @@
           </a:fontRef>
         </p:style>
         <p:txBody>
-          <a:bodyPr rtlCol="0" anchor="t" wrap="square" lIns="146304" rIns="128016" tIns="182880"/>
-          <a:lstStyle/>
-          <a:p>
-            <a:pPr algn="l">
+          <a:bodyPr rtlCol="0" anchor="ctr" wrap="square" lIns="146304" rIns="128016" tIns="182880"/>
+          <a:lstStyle/>
+          <a:p>
+            <a:pPr algn="ctr">
               <a:spcAft>
                 <a:spcPts val="800"/>
               </a:spcAft>
@@ -5248,17 +5263,17 @@
             <a:r>
               <a:rPr sz="1400" b="1">
                 <a:solidFill>
-                  <a:srgbClr val="B26A00"/>
-                </a:solidFill>
-                <a:latin typeface="Cambria"/>
-              </a:rPr>
-              <a:t>On track for next milestones</a:t>
-            </a:r>
-          </a:p>
-          <a:p>
-            <a:pPr algn="l">
+                  <a:srgbClr val="2E7D32"/>
+                </a:solidFill>
+                <a:latin typeface="Cambria"/>
+              </a:rPr>
+              <a:t>Engineering discipline</a:t>
+            </a:r>
+          </a:p>
+          <a:p>
+            <a:pPr>
               <a:spcAft>
-                <a:spcPts val="400"/>
+                <a:spcPts val="800"/>
               </a:spcAft>
             </a:pPr>
             <a:r>
@@ -5268,7 +5283,7 @@
                 </a:solidFill>
                 <a:latin typeface="Cambria"/>
               </a:rPr>
-              <a:t>Next: accuracy metrics, hardening, SRS, and the final report.</a:t>
+              <a:t>27 automated tests, continuous integration, one-command deployment.</a:t>
             </a:r>
           </a:p>
         </p:txBody>
@@ -5542,6 +5557,817 @@
                 <a:latin typeface="Cambria"/>
               </a:rPr>
               <a:t>Joshi Om · Krish Gajera · Drashti Dedaniya  —  CHARUSAT · DEPSTAR</a:t>
+            </a:r>
+          </a:p>
+        </p:txBody>
+      </p:sp>
+    </p:spTree>
+  </p:cSld>
+  <p:clrMapOvr>
+    <a:masterClrMapping/>
+  </p:clrMapOvr>
+</p:sld>
+</file>
+
+<file path=ppt/slides/slide14.xml><?xml version="1.0" encoding="utf-8"?>
+<p:sld xmlns:a="http://schemas.openxmlformats.org/drawingml/2006/main" xmlns:p="http://schemas.openxmlformats.org/presentationml/2006/main" xmlns:r="http://schemas.openxmlformats.org/officeDocument/2006/relationships">
+  <p:cSld>
+    <p:spTree>
+      <p:nvGrpSpPr>
+        <p:cNvPr id="1" name=""/>
+        <p:cNvGrpSpPr/>
+        <p:nvPr/>
+      </p:nvGrpSpPr>
+      <p:grpSpPr/>
+      <p:sp>
+        <p:nvSpPr>
+          <p:cNvPr id="2" name="Title 1"/>
+          <p:cNvSpPr>
+            <a:spLocks noGrp="1"/>
+          </p:cNvSpPr>
+          <p:nvPr>
+            <p:ph type="title"/>
+          </p:nvPr>
+        </p:nvSpPr>
+        <p:spPr/>
+        <p:txBody>
+          <a:bodyPr/>
+          <a:lstStyle/>
+          <a:p>
+            <a:r>
+              <a:rPr sz="2800" b="1">
+                <a:solidFill>
+                  <a:srgbClr val="002060"/>
+                </a:solidFill>
+                <a:latin typeface="Cambria"/>
+              </a:rPr>
+              <a:t>Detection Accuracy — Measured Results</a:t>
+            </a:r>
+          </a:p>
+        </p:txBody>
+      </p:sp>
+      <p:sp>
+        <p:nvSpPr>
+          <p:cNvPr id="3" name="TextBox 2"/>
+          <p:cNvSpPr txBox="1"/>
+          <p:nvPr/>
+        </p:nvSpPr>
+        <p:spPr>
+          <a:xfrm>
+            <a:off x="502920" y="1298448"/>
+            <a:ext cx="11155680" cy="365760"/>
+          </a:xfrm>
+          <a:prstGeom prst="rect">
+            <a:avLst/>
+          </a:prstGeom>
+          <a:noFill/>
+        </p:spPr>
+        <p:txBody>
+          <a:bodyPr wrap="none">
+            <a:spAutoFit/>
+          </a:bodyPr>
+          <a:lstStyle/>
+          <a:p>
+            <a:r>
+              <a:rPr sz="1400">
+                <a:solidFill>
+                  <a:srgbClr val="555B66"/>
+                </a:solidFill>
+                <a:latin typeface="Cambria"/>
+              </a:rPr>
+              <a:t>208 labelled synthetic transactions — 52 fraudulent, 156 legitimate — replayed through the complete pipeline</a:t>
+            </a:r>
+          </a:p>
+        </p:txBody>
+      </p:sp>
+      <p:sp>
+        <p:nvSpPr>
+          <p:cNvPr id="4" name="Rounded Rectangle 3"/>
+          <p:cNvSpPr/>
+          <p:nvPr/>
+        </p:nvSpPr>
+        <p:spPr>
+          <a:xfrm>
+            <a:off x="502920" y="1783080"/>
+            <a:ext cx="2697480" cy="1417320"/>
+          </a:xfrm>
+          <a:prstGeom prst="roundRect">
+            <a:avLst/>
+          </a:prstGeom>
+          <a:solidFill>
+            <a:srgbClr val="F4F6FA"/>
+          </a:solidFill>
+          <a:ln>
+            <a:solidFill>
+              <a:srgbClr val="C7D0DE"/>
+            </a:solidFill>
+          </a:ln>
+          <a:effectLst/>
+        </p:spPr>
+        <p:style>
+          <a:lnRef idx="1">
+            <a:schemeClr val="accent1"/>
+          </a:lnRef>
+          <a:fillRef idx="3">
+            <a:schemeClr val="accent1"/>
+          </a:fillRef>
+          <a:effectRef idx="2">
+            <a:schemeClr val="accent1"/>
+          </a:effectRef>
+          <a:fontRef idx="minor">
+            <a:schemeClr val="lt1"/>
+          </a:fontRef>
+        </p:style>
+        <p:txBody>
+          <a:bodyPr rtlCol="0" anchor="ctr" wrap="square" tIns="109728"/>
+          <a:lstStyle/>
+          <a:p>
+            <a:pPr algn="ctr">
+              <a:spcAft>
+                <a:spcPts val="100"/>
+              </a:spcAft>
+            </a:pPr>
+            <a:r>
+              <a:rPr sz="3000" b="1">
+                <a:solidFill>
+                  <a:srgbClr val="2E7D32"/>
+                </a:solidFill>
+                <a:latin typeface="Cambria"/>
+              </a:rPr>
+              <a:t>93.8%</a:t>
+            </a:r>
+          </a:p>
+          <a:p>
+            <a:pPr algn="ctr">
+              <a:spcAft>
+                <a:spcPts val="100"/>
+              </a:spcAft>
+            </a:pPr>
+            <a:r>
+              <a:rPr sz="1300" b="1">
+                <a:solidFill>
+                  <a:srgbClr val="002060"/>
+                </a:solidFill>
+                <a:latin typeface="Cambria"/>
+              </a:rPr>
+              <a:t>Precision</a:t>
+            </a:r>
+          </a:p>
+          <a:p>
+            <a:pPr algn="ctr">
+              <a:spcAft>
+                <a:spcPts val="100"/>
+              </a:spcAft>
+            </a:pPr>
+            <a:r>
+              <a:rPr sz="1050" b="0">
+                <a:solidFill>
+                  <a:srgbClr val="555B66"/>
+                </a:solidFill>
+                <a:latin typeface="Cambria"/>
+              </a:rPr>
+              <a:t>of flagged were fraud</a:t>
+            </a:r>
+          </a:p>
+        </p:txBody>
+      </p:sp>
+      <p:sp>
+        <p:nvSpPr>
+          <p:cNvPr id="5" name="Rounded Rectangle 4"/>
+          <p:cNvSpPr/>
+          <p:nvPr/>
+        </p:nvSpPr>
+        <p:spPr>
+          <a:xfrm>
+            <a:off x="3337560" y="1783080"/>
+            <a:ext cx="2697480" cy="1417320"/>
+          </a:xfrm>
+          <a:prstGeom prst="roundRect">
+            <a:avLst/>
+          </a:prstGeom>
+          <a:solidFill>
+            <a:srgbClr val="F4F6FA"/>
+          </a:solidFill>
+          <a:ln>
+            <a:solidFill>
+              <a:srgbClr val="C7D0DE"/>
+            </a:solidFill>
+          </a:ln>
+          <a:effectLst/>
+        </p:spPr>
+        <p:style>
+          <a:lnRef idx="1">
+            <a:schemeClr val="accent1"/>
+          </a:lnRef>
+          <a:fillRef idx="3">
+            <a:schemeClr val="accent1"/>
+          </a:fillRef>
+          <a:effectRef idx="2">
+            <a:schemeClr val="accent1"/>
+          </a:effectRef>
+          <a:fontRef idx="minor">
+            <a:schemeClr val="lt1"/>
+          </a:fontRef>
+        </p:style>
+        <p:txBody>
+          <a:bodyPr rtlCol="0" anchor="ctr" wrap="square" tIns="109728"/>
+          <a:lstStyle/>
+          <a:p>
+            <a:pPr algn="ctr">
+              <a:spcAft>
+                <a:spcPts val="100"/>
+              </a:spcAft>
+            </a:pPr>
+            <a:r>
+              <a:rPr sz="3000" b="1">
+                <a:solidFill>
+                  <a:srgbClr val="028090"/>
+                </a:solidFill>
+                <a:latin typeface="Cambria"/>
+              </a:rPr>
+              <a:t>86.5%</a:t>
+            </a:r>
+          </a:p>
+          <a:p>
+            <a:pPr algn="ctr">
+              <a:spcAft>
+                <a:spcPts val="100"/>
+              </a:spcAft>
+            </a:pPr>
+            <a:r>
+              <a:rPr sz="1300" b="1">
+                <a:solidFill>
+                  <a:srgbClr val="002060"/>
+                </a:solidFill>
+                <a:latin typeface="Cambria"/>
+              </a:rPr>
+              <a:t>Recall</a:t>
+            </a:r>
+          </a:p>
+          <a:p>
+            <a:pPr algn="ctr">
+              <a:spcAft>
+                <a:spcPts val="100"/>
+              </a:spcAft>
+            </a:pPr>
+            <a:r>
+              <a:rPr sz="1050" b="0">
+                <a:solidFill>
+                  <a:srgbClr val="555B66"/>
+                </a:solidFill>
+                <a:latin typeface="Cambria"/>
+              </a:rPr>
+              <a:t>of fraud was caught</a:t>
+            </a:r>
+          </a:p>
+        </p:txBody>
+      </p:sp>
+      <p:sp>
+        <p:nvSpPr>
+          <p:cNvPr id="6" name="Rounded Rectangle 5"/>
+          <p:cNvSpPr/>
+          <p:nvPr/>
+        </p:nvSpPr>
+        <p:spPr>
+          <a:xfrm>
+            <a:off x="6172200" y="1783080"/>
+            <a:ext cx="2697480" cy="1417320"/>
+          </a:xfrm>
+          <a:prstGeom prst="roundRect">
+            <a:avLst/>
+          </a:prstGeom>
+          <a:solidFill>
+            <a:srgbClr val="F4F6FA"/>
+          </a:solidFill>
+          <a:ln>
+            <a:solidFill>
+              <a:srgbClr val="C7D0DE"/>
+            </a:solidFill>
+          </a:ln>
+          <a:effectLst/>
+        </p:spPr>
+        <p:style>
+          <a:lnRef idx="1">
+            <a:schemeClr val="accent1"/>
+          </a:lnRef>
+          <a:fillRef idx="3">
+            <a:schemeClr val="accent1"/>
+          </a:fillRef>
+          <a:effectRef idx="2">
+            <a:schemeClr val="accent1"/>
+          </a:effectRef>
+          <a:fontRef idx="minor">
+            <a:schemeClr val="lt1"/>
+          </a:fontRef>
+        </p:style>
+        <p:txBody>
+          <a:bodyPr rtlCol="0" anchor="ctr" wrap="square" tIns="109728"/>
+          <a:lstStyle/>
+          <a:p>
+            <a:pPr algn="ctr">
+              <a:spcAft>
+                <a:spcPts val="100"/>
+              </a:spcAft>
+            </a:pPr>
+            <a:r>
+              <a:rPr sz="3000" b="1">
+                <a:solidFill>
+                  <a:srgbClr val="002060"/>
+                </a:solidFill>
+                <a:latin typeface="Cambria"/>
+              </a:rPr>
+              <a:t>0.90</a:t>
+            </a:r>
+          </a:p>
+          <a:p>
+            <a:pPr algn="ctr">
+              <a:spcAft>
+                <a:spcPts val="100"/>
+              </a:spcAft>
+            </a:pPr>
+            <a:r>
+              <a:rPr sz="1300" b="1">
+                <a:solidFill>
+                  <a:srgbClr val="002060"/>
+                </a:solidFill>
+                <a:latin typeface="Cambria"/>
+              </a:rPr>
+              <a:t>F1 score</a:t>
+            </a:r>
+          </a:p>
+          <a:p>
+            <a:pPr algn="ctr">
+              <a:spcAft>
+                <a:spcPts val="100"/>
+              </a:spcAft>
+            </a:pPr>
+            <a:r>
+              <a:rPr sz="1050" b="0">
+                <a:solidFill>
+                  <a:srgbClr val="555B66"/>
+                </a:solidFill>
+                <a:latin typeface="Cambria"/>
+              </a:rPr>
+              <a:t>combined measure</a:t>
+            </a:r>
+          </a:p>
+        </p:txBody>
+      </p:sp>
+      <p:sp>
+        <p:nvSpPr>
+          <p:cNvPr id="7" name="Rounded Rectangle 6"/>
+          <p:cNvSpPr/>
+          <p:nvPr/>
+        </p:nvSpPr>
+        <p:spPr>
+          <a:xfrm>
+            <a:off x="9006840" y="1783080"/>
+            <a:ext cx="2697480" cy="1417320"/>
+          </a:xfrm>
+          <a:prstGeom prst="roundRect">
+            <a:avLst/>
+          </a:prstGeom>
+          <a:solidFill>
+            <a:srgbClr val="F4F6FA"/>
+          </a:solidFill>
+          <a:ln>
+            <a:solidFill>
+              <a:srgbClr val="C7D0DE"/>
+            </a:solidFill>
+          </a:ln>
+          <a:effectLst/>
+        </p:spPr>
+        <p:style>
+          <a:lnRef idx="1">
+            <a:schemeClr val="accent1"/>
+          </a:lnRef>
+          <a:fillRef idx="3">
+            <a:schemeClr val="accent1"/>
+          </a:fillRef>
+          <a:effectRef idx="2">
+            <a:schemeClr val="accent1"/>
+          </a:effectRef>
+          <a:fontRef idx="minor">
+            <a:schemeClr val="lt1"/>
+          </a:fontRef>
+        </p:style>
+        <p:txBody>
+          <a:bodyPr rtlCol="0" anchor="ctr" wrap="square" tIns="109728"/>
+          <a:lstStyle/>
+          <a:p>
+            <a:pPr algn="ctr">
+              <a:spcAft>
+                <a:spcPts val="100"/>
+              </a:spcAft>
+            </a:pPr>
+            <a:r>
+              <a:rPr sz="3000" b="1">
+                <a:solidFill>
+                  <a:srgbClr val="2E7D32"/>
+                </a:solidFill>
+                <a:latin typeface="Cambria"/>
+              </a:rPr>
+              <a:t>36/36</a:t>
+            </a:r>
+          </a:p>
+          <a:p>
+            <a:pPr algn="ctr">
+              <a:spcAft>
+                <a:spcPts val="100"/>
+              </a:spcAft>
+            </a:pPr>
+            <a:r>
+              <a:rPr sz="1300" b="1">
+                <a:solidFill>
+                  <a:srgbClr val="002060"/>
+                </a:solidFill>
+                <a:latin typeface="Cambria"/>
+              </a:rPr>
+              <a:t>Ring recall</a:t>
+            </a:r>
+          </a:p>
+          <a:p>
+            <a:pPr algn="ctr">
+              <a:spcAft>
+                <a:spcPts val="100"/>
+              </a:spcAft>
+            </a:pPr>
+            <a:r>
+              <a:rPr sz="1050" b="0">
+                <a:solidFill>
+                  <a:srgbClr val="555B66"/>
+                </a:solidFill>
+                <a:latin typeface="Cambria"/>
+              </a:rPr>
+              <a:t>mule-ring hops detected</a:t>
+            </a:r>
+          </a:p>
+        </p:txBody>
+      </p:sp>
+      <p:graphicFrame>
+        <p:nvGraphicFramePr>
+          <p:cNvPr id="8" name="Table 7"/>
+          <p:cNvGraphicFramePr>
+            <a:graphicFrameLocks noGrp="1"/>
+          </p:cNvGraphicFramePr>
+          <p:nvPr/>
+        </p:nvGraphicFramePr>
+        <p:xfrm>
+          <a:off x="502920" y="3337560"/>
+          <a:ext cx="5577840" cy="1737360"/>
+        </p:xfrm>
+        <a:graphic>
+          <a:graphicData uri="http://schemas.openxmlformats.org/drawingml/2006/table">
+            <a:tbl>
+              <a:tblPr firstRow="1" bandRow="1">
+                <a:tableStyleId>{5C22544A-7EE6-4342-B048-85BDC9FD1C3A}</a:tableStyleId>
+              </a:tblPr>
+              <a:tblGrid>
+                <a:gridCol w="1859280"/>
+                <a:gridCol w="1859280"/>
+                <a:gridCol w="1859280"/>
+              </a:tblGrid>
+              <a:tr h="434340">
+                <a:tc>
+                  <a:txBody>
+                    <a:bodyPr/>
+                    <a:lstStyle/>
+                    <a:p>
+                      <a:r>
+                        <a:rPr sz="1200" b="1">
+                          <a:solidFill>
+                            <a:srgbClr val="FFFFFF"/>
+                          </a:solidFill>
+                          <a:latin typeface="Cambria"/>
+                        </a:rPr>
+                        <a:t>Decision</a:t>
+                      </a:r>
+                    </a:p>
+                  </a:txBody>
+                  <a:tcPr>
+                    <a:solidFill>
+                      <a:srgbClr val="002060"/>
+                    </a:solidFill>
+                  </a:tcPr>
+                </a:tc>
+                <a:tc>
+                  <a:txBody>
+                    <a:bodyPr/>
+                    <a:lstStyle/>
+                    <a:p>
+                      <a:r>
+                        <a:rPr sz="1200" b="1">
+                          <a:solidFill>
+                            <a:srgbClr val="FFFFFF"/>
+                          </a:solidFill>
+                          <a:latin typeface="Cambria"/>
+                        </a:rPr>
+                        <a:t>Actually fraud</a:t>
+                      </a:r>
+                    </a:p>
+                  </a:txBody>
+                  <a:tcPr>
+                    <a:solidFill>
+                      <a:srgbClr val="002060"/>
+                    </a:solidFill>
+                  </a:tcPr>
+                </a:tc>
+                <a:tc>
+                  <a:txBody>
+                    <a:bodyPr/>
+                    <a:lstStyle/>
+                    <a:p>
+                      <a:r>
+                        <a:rPr sz="1200" b="1">
+                          <a:solidFill>
+                            <a:srgbClr val="FFFFFF"/>
+                          </a:solidFill>
+                          <a:latin typeface="Cambria"/>
+                        </a:rPr>
+                        <a:t>Actually legitimate</a:t>
+                      </a:r>
+                    </a:p>
+                  </a:txBody>
+                  <a:tcPr>
+                    <a:solidFill>
+                      <a:srgbClr val="002060"/>
+                    </a:solidFill>
+                  </a:tcPr>
+                </a:tc>
+              </a:tr>
+              <a:tr h="434340">
+                <a:tc>
+                  <a:txBody>
+                    <a:bodyPr/>
+                    <a:lstStyle/>
+                    <a:p>
+                      <a:r>
+                        <a:rPr sz="1200" b="0">
+                          <a:solidFill>
+                            <a:srgbClr val="222833"/>
+                          </a:solidFill>
+                          <a:latin typeface="Cambria"/>
+                        </a:rPr>
+                        <a:t>APPROVE</a:t>
+                      </a:r>
+                    </a:p>
+                  </a:txBody>
+                  <a:tcPr/>
+                </a:tc>
+                <a:tc>
+                  <a:txBody>
+                    <a:bodyPr/>
+                    <a:lstStyle/>
+                    <a:p>
+                      <a:r>
+                        <a:rPr sz="1200" b="0">
+                          <a:solidFill>
+                            <a:srgbClr val="222833"/>
+                          </a:solidFill>
+                          <a:latin typeface="Cambria"/>
+                        </a:rPr>
+                        <a:t>7</a:t>
+                      </a:r>
+                    </a:p>
+                  </a:txBody>
+                  <a:tcPr/>
+                </a:tc>
+                <a:tc>
+                  <a:txBody>
+                    <a:bodyPr/>
+                    <a:lstStyle/>
+                    <a:p>
+                      <a:r>
+                        <a:rPr sz="1200" b="0">
+                          <a:solidFill>
+                            <a:srgbClr val="222833"/>
+                          </a:solidFill>
+                          <a:latin typeface="Cambria"/>
+                        </a:rPr>
+                        <a:t>153</a:t>
+                      </a:r>
+                    </a:p>
+                  </a:txBody>
+                  <a:tcPr/>
+                </a:tc>
+              </a:tr>
+              <a:tr h="434340">
+                <a:tc>
+                  <a:txBody>
+                    <a:bodyPr/>
+                    <a:lstStyle/>
+                    <a:p>
+                      <a:r>
+                        <a:rPr sz="1200" b="0">
+                          <a:solidFill>
+                            <a:srgbClr val="222833"/>
+                          </a:solidFill>
+                          <a:latin typeface="Cambria"/>
+                        </a:rPr>
+                        <a:t>REVIEW</a:t>
+                      </a:r>
+                    </a:p>
+                  </a:txBody>
+                  <a:tcPr/>
+                </a:tc>
+                <a:tc>
+                  <a:txBody>
+                    <a:bodyPr/>
+                    <a:lstStyle/>
+                    <a:p>
+                      <a:r>
+                        <a:rPr sz="1200" b="0">
+                          <a:solidFill>
+                            <a:srgbClr val="222833"/>
+                          </a:solidFill>
+                          <a:latin typeface="Cambria"/>
+                        </a:rPr>
+                        <a:t>45</a:t>
+                      </a:r>
+                    </a:p>
+                  </a:txBody>
+                  <a:tcPr/>
+                </a:tc>
+                <a:tc>
+                  <a:txBody>
+                    <a:bodyPr/>
+                    <a:lstStyle/>
+                    <a:p>
+                      <a:r>
+                        <a:rPr sz="1200" b="0">
+                          <a:solidFill>
+                            <a:srgbClr val="222833"/>
+                          </a:solidFill>
+                          <a:latin typeface="Cambria"/>
+                        </a:rPr>
+                        <a:t>3</a:t>
+                      </a:r>
+                    </a:p>
+                  </a:txBody>
+                  <a:tcPr/>
+                </a:tc>
+              </a:tr>
+              <a:tr h="434340">
+                <a:tc>
+                  <a:txBody>
+                    <a:bodyPr/>
+                    <a:lstStyle/>
+                    <a:p>
+                      <a:r>
+                        <a:rPr sz="1200" b="0">
+                          <a:solidFill>
+                            <a:srgbClr val="222833"/>
+                          </a:solidFill>
+                          <a:latin typeface="Cambria"/>
+                        </a:rPr>
+                        <a:t>BLOCK</a:t>
+                      </a:r>
+                    </a:p>
+                  </a:txBody>
+                  <a:tcPr/>
+                </a:tc>
+                <a:tc>
+                  <a:txBody>
+                    <a:bodyPr/>
+                    <a:lstStyle/>
+                    <a:p>
+                      <a:r>
+                        <a:rPr sz="1200" b="0">
+                          <a:solidFill>
+                            <a:srgbClr val="222833"/>
+                          </a:solidFill>
+                          <a:latin typeface="Cambria"/>
+                        </a:rPr>
+                        <a:t>0</a:t>
+                      </a:r>
+                    </a:p>
+                  </a:txBody>
+                  <a:tcPr/>
+                </a:tc>
+                <a:tc>
+                  <a:txBody>
+                    <a:bodyPr/>
+                    <a:lstStyle/>
+                    <a:p>
+                      <a:r>
+                        <a:rPr sz="1200" b="0">
+                          <a:solidFill>
+                            <a:srgbClr val="222833"/>
+                          </a:solidFill>
+                          <a:latin typeface="Cambria"/>
+                        </a:rPr>
+                        <a:t>0</a:t>
+                      </a:r>
+                    </a:p>
+                  </a:txBody>
+                  <a:tcPr/>
+                </a:tc>
+              </a:tr>
+            </a:tbl>
+          </a:graphicData>
+        </a:graphic>
+      </p:graphicFrame>
+      <p:sp>
+        <p:nvSpPr>
+          <p:cNvPr id="9" name="TextBox 8"/>
+          <p:cNvSpPr txBox="1"/>
+          <p:nvPr/>
+        </p:nvSpPr>
+        <p:spPr>
+          <a:xfrm>
+            <a:off x="6400800" y="3337560"/>
+            <a:ext cx="5303520" cy="2194560"/>
+          </a:xfrm>
+          <a:prstGeom prst="rect">
+            <a:avLst/>
+          </a:prstGeom>
+          <a:noFill/>
+        </p:spPr>
+        <p:txBody>
+          <a:bodyPr wrap="square">
+            <a:spAutoFit/>
+          </a:bodyPr>
+          <a:lstStyle/>
+          <a:p>
+            <a:pPr>
+              <a:spcAft>
+                <a:spcPts val="600"/>
+              </a:spcAft>
+            </a:pPr>
+            <a:r>
+              <a:rPr sz="1500" b="1">
+                <a:solidFill>
+                  <a:srgbClr val="C62828"/>
+                </a:solidFill>
+                <a:latin typeface="Cambria"/>
+              </a:rPr>
+              <a:t>Key finding</a:t>
+            </a:r>
+          </a:p>
+          <a:p>
+            <a:pPr>
+              <a:spcAft>
+                <a:spcPts val="600"/>
+              </a:spcAft>
+            </a:pPr>
+            <a:r>
+              <a:rPr sz="1350" b="1">
+                <a:solidFill>
+                  <a:srgbClr val="222833"/>
+                </a:solidFill>
+                <a:latin typeface="Cambria"/>
+              </a:rPr>
+              <a:t>No transaction reached the block threshold of 70.</a:t>
+            </a:r>
+          </a:p>
+          <a:p>
+            <a:pPr>
+              <a:spcAft>
+                <a:spcPts val="600"/>
+              </a:spcAft>
+            </a:pPr>
+            <a:r>
+              <a:rPr sz="1250" b="0">
+                <a:solidFill>
+                  <a:srgbClr val="555B66"/>
+                </a:solidFill>
+                <a:latin typeface="Cambria"/>
+              </a:rPr>
+              <a:t>Every detection is routed to a human analyst; nothing is blocked automatically. Lowering the band would automate blocking — but would also auto-block the three false positives. That is a policy decision, not a configuration change.</a:t>
+            </a:r>
+          </a:p>
+        </p:txBody>
+      </p:sp>
+      <p:sp>
+        <p:nvSpPr>
+          <p:cNvPr id="10" name="TextBox 9"/>
+          <p:cNvSpPr txBox="1"/>
+          <p:nvPr/>
+        </p:nvSpPr>
+        <p:spPr>
+          <a:xfrm>
+            <a:off x="502920" y="5303520"/>
+            <a:ext cx="11155680" cy="548640"/>
+          </a:xfrm>
+          <a:prstGeom prst="rect">
+            <a:avLst/>
+          </a:prstGeom>
+          <a:noFill/>
+        </p:spPr>
+        <p:txBody>
+          <a:bodyPr wrap="square">
+            <a:spAutoFit/>
+          </a:bodyPr>
+          <a:lstStyle/>
+          <a:p>
+            <a:r>
+              <a:rPr sz="1150" i="1">
+                <a:solidFill>
+                  <a:srgbClr val="555B66"/>
+                </a:solidFill>
+                <a:latin typeface="Cambria"/>
+              </a:rPr>
+              <a:t>Measured on synthetic data in which fraud is far denser than a real payment feed, so precision here is optimistic — it measures the separation between the engines, not production performance.</a:t>
             </a:r>
           </a:p>
         </p:txBody>
@@ -5893,7 +6719,7 @@
                 </a:solidFill>
                 <a:latin typeface="Cambria"/>
               </a:rPr>
-              <a:t>Mentor Feedback &amp; Improvements</a:t>
+              <a:t>Guide Feedback &amp; Improvements</a:t>
             </a:r>
           </a:p>
         </p:txBody>
@@ -5919,7 +6745,7 @@
               </a:spcAft>
             </a:pPr>
             <a:r>
-              <a:rPr sz="1600" b="1">
+              <a:rPr sz="1500" b="1">
                 <a:solidFill>
                   <a:srgbClr val="002060"/>
                 </a:solidFill>
@@ -5935,13 +6761,13 @@
               </a:spcAft>
             </a:pPr>
             <a:r>
-              <a:rPr sz="1400" b="0">
+              <a:rPr sz="1300" b="0">
                 <a:solidFill>
                   <a:srgbClr val="222833"/>
                 </a:solidFill>
                 <a:latin typeface="Cambria"/>
               </a:rPr>
-              <a:t>Show real technical progress, not just the idea</a:t>
+              <a:t>Show measured evidence, not just a working demo</a:t>
             </a:r>
           </a:p>
           <a:p>
@@ -5951,13 +6777,13 @@
               </a:spcAft>
             </a:pPr>
             <a:r>
-              <a:rPr sz="1400" b="0">
+              <a:rPr sz="1300" b="0">
                 <a:solidFill>
                   <a:srgbClr val="222833"/>
                 </a:solidFill>
                 <a:latin typeface="Cambria"/>
               </a:rPr>
-              <a:t>Present a concrete architecture &amp; module design</a:t>
+              <a:t>SRS: correct DFD notation and UML diagrams</a:t>
             </a:r>
           </a:p>
           <a:p>
@@ -5967,13 +6793,13 @@
               </a:spcAft>
             </a:pPr>
             <a:r>
-              <a:rPr sz="1400" b="0">
+              <a:rPr sz="1300" b="0">
                 <a:solidFill>
                   <a:srgbClr val="222833"/>
                 </a:solidFill>
                 <a:latin typeface="Cambria"/>
               </a:rPr>
-              <a:t>Add a process-flow / data-flow diagram</a:t>
+              <a:t>Single spacing; each chapter on a new page</a:t>
             </a:r>
           </a:p>
           <a:p>
@@ -5983,13 +6809,13 @@
               </a:spcAft>
             </a:pPr>
             <a:r>
-              <a:rPr sz="1400" b="0">
+              <a:rPr sz="1300" b="0">
                 <a:solidFill>
                   <a:srgbClr val="222833"/>
                 </a:solidFill>
                 <a:latin typeface="Cambria"/>
               </a:rPr>
-              <a:t>Compare existing solutions (literature review)</a:t>
+              <a:t>Conclusion, References, Definitions last, unnumbered</a:t>
             </a:r>
           </a:p>
           <a:p>
@@ -5999,13 +6825,13 @@
               </a:spcAft>
             </a:pPr>
             <a:r>
-              <a:rPr sz="1400" b="0">
+              <a:rPr sz="1300" b="0">
                 <a:solidFill>
                   <a:srgbClr val="222833"/>
                 </a:solidFill>
                 <a:latin typeface="Cambria"/>
               </a:rPr>
-              <a:t>Provide implementation evidence — code, screenshots</a:t>
+              <a:t>Abstract must be written by the team</a:t>
             </a:r>
           </a:p>
           <a:p>
@@ -6015,13 +6841,13 @@
               </a:spcAft>
             </a:pPr>
             <a:r>
-              <a:rPr sz="1400" b="0">
+              <a:rPr sz="1300" b="0">
                 <a:solidFill>
                   <a:srgbClr val="222833"/>
                 </a:solidFill>
                 <a:latin typeface="Cambria"/>
               </a:rPr>
-              <a:t>Set up GitHub with team + mentor as collaborators</a:t>
+              <a:t>Keep the repository updated for review</a:t>
             </a:r>
           </a:p>
         </p:txBody>
@@ -6047,13 +6873,13 @@
               </a:spcAft>
             </a:pPr>
             <a:r>
-              <a:rPr sz="1600" b="1">
+              <a:rPr sz="1500" b="1">
                 <a:solidFill>
                   <a:srgbClr val="2E7D32"/>
                 </a:solidFill>
                 <a:latin typeface="Cambria"/>
               </a:rPr>
-              <a:t>Improvements made</a:t>
+              <a:t>Action taken</a:t>
             </a:r>
           </a:p>
           <a:p>
@@ -6063,13 +6889,13 @@
               </a:spcAft>
             </a:pPr>
             <a:r>
-              <a:rPr sz="1400" b="0">
+              <a:rPr sz="1300" b="0">
                 <a:solidFill>
                   <a:srgbClr val="222833"/>
                 </a:solidFill>
                 <a:latin typeface="Cambria"/>
               </a:rPr>
-              <a:t>Concept → running end-to-end prototype</a:t>
+              <a:t>Built an evaluation harness; results in this deck</a:t>
             </a:r>
           </a:p>
           <a:p>
@@ -6079,13 +6905,13 @@
               </a:spcAft>
             </a:pPr>
             <a:r>
-              <a:rPr sz="1400" b="0">
+              <a:rPr sz="1300" b="0">
                 <a:solidFill>
                   <a:srgbClr val="222833"/>
                 </a:solidFill>
                 <a:latin typeface="Cambria"/>
               </a:rPr>
-              <a:t>Documented 5-layer architecture + interactions</a:t>
+              <a:t>DFDs redrawn in Gane-Sarson notation; 7 UML diagrams</a:t>
             </a:r>
           </a:p>
           <a:p>
@@ -6095,13 +6921,13 @@
               </a:spcAft>
             </a:pPr>
             <a:r>
-              <a:rPr sz="1400" b="0">
+              <a:rPr sz="1300" b="0">
                 <a:solidFill>
                   <a:srgbClr val="222833"/>
                 </a:solidFill>
                 <a:latin typeface="Cambria"/>
               </a:rPr>
-              <a:t>Added step-by-step DFD of the pipeline</a:t>
+              <a:t>Document reformatted to the prescribed style</a:t>
             </a:r>
           </a:p>
           <a:p>
@@ -6111,13 +6937,13 @@
               </a:spcAft>
             </a:pPr>
             <a:r>
-              <a:rPr sz="1400" b="0">
+              <a:rPr sz="1300" b="0">
                 <a:solidFill>
                   <a:srgbClr val="222833"/>
                 </a:solidFill>
                 <a:latin typeface="Cambria"/>
               </a:rPr>
-              <a:t>Built comparison of commercial systems + research</a:t>
+              <a:t>Sections reordered as instructed</a:t>
             </a:r>
           </a:p>
           <a:p>
@@ -6127,13 +6953,13 @@
               </a:spcAft>
             </a:pPr>
             <a:r>
-              <a:rPr sz="1400" b="0">
+              <a:rPr sz="1300" b="0">
                 <a:solidFill>
                   <a:srgbClr val="222833"/>
                 </a:solidFill>
                 <a:latin typeface="Cambria"/>
               </a:rPr>
-              <a:t>Live dashboard + 12 REST APIs on real data</a:t>
+              <a:t>Abstract being written by the team</a:t>
             </a:r>
           </a:p>
           <a:p>
@@ -6143,13 +6969,13 @@
               </a:spcAft>
             </a:pPr>
             <a:r>
-              <a:rPr sz="1400" b="0">
+              <a:rPr sz="1300" b="0">
                 <a:solidFill>
                   <a:srgbClr val="222833"/>
                 </a:solidFill>
                 <a:latin typeface="Cambria"/>
               </a:rPr>
-              <a:t>Repository organised with structured commits</a:t>
+              <a:t>Repository public with continuous integration</a:t>
             </a:r>
           </a:p>
         </p:txBody>

--- a/docs/Indus11-Review2.pptx
+++ b/docs/Indus11-Review2.pptx
@@ -21,9 +21,11 @@
     <p:sldId id="263" r:id="rId15"/>
     <p:sldId id="264" r:id="rId16"/>
     <p:sldId id="269" r:id="rId21"/>
+    <p:sldId id="270" r:id="rId22"/>
     <p:sldId id="265" r:id="rId17"/>
     <p:sldId id="266" r:id="rId18"/>
     <p:sldId id="267" r:id="rId19"/>
+    <p:sldId id="271" r:id="rId23"/>
     <p:sldId id="268" r:id="rId20"/>
   </p:sldIdLst>
   <p:sldSz cx="12192000" cy="6858000"/>
@@ -4648,959 +4650,6 @@
                 </a:solidFill>
                 <a:latin typeface="Cambria"/>
               </a:rPr>
-              <a:t>Challenges Faced &amp; Future Work</a:t>
-            </a:r>
-          </a:p>
-        </p:txBody>
-      </p:sp>
-      <p:sp>
-        <p:nvSpPr>
-          <p:cNvPr id="3" name="Content Placeholder 2"/>
-          <p:cNvSpPr>
-            <a:spLocks noGrp="1"/>
-          </p:cNvSpPr>
-          <p:nvPr>
-            <p:ph idx="1" sz="half"/>
-          </p:nvPr>
-        </p:nvSpPr>
-        <p:spPr/>
-        <p:txBody>
-          <a:bodyPr wrap="square"/>
-          <a:lstStyle/>
-          <a:p>
-            <a:pPr>
-              <a:spcAft>
-                <a:spcPts val="700"/>
-              </a:spcAft>
-            </a:pPr>
-            <a:r>
-              <a:rPr sz="1500" b="1">
-                <a:solidFill>
-                  <a:srgbClr val="B26A00"/>
-                </a:solidFill>
-                <a:latin typeface="Cambria"/>
-              </a:rPr>
-              <a:t>Challenges faced</a:t>
-            </a:r>
-          </a:p>
-          <a:p>
-            <a:pPr lvl="1">
-              <a:spcAft>
-                <a:spcPts val="400"/>
-              </a:spcAft>
-            </a:pPr>
-            <a:r>
-              <a:rPr sz="1300" b="0">
-                <a:solidFill>
-                  <a:srgbClr val="222833"/>
-                </a:solidFill>
-                <a:latin typeface="Cambria"/>
-              </a:rPr>
-              <a:t>Coordinating four data stores on one machine</a:t>
-            </a:r>
-          </a:p>
-          <a:p>
-            <a:pPr lvl="1">
-              <a:spcAft>
-                <a:spcPts val="400"/>
-              </a:spcAft>
-            </a:pPr>
-            <a:r>
-              <a:rPr sz="1300" b="0">
-                <a:solidFill>
-                  <a:srgbClr val="222833"/>
-                </a:solidFill>
-                <a:latin typeface="Cambria"/>
-              </a:rPr>
-              <a:t>Keeping model output consistent — solved with a 30-point cap</a:t>
-            </a:r>
-          </a:p>
-          <a:p>
-            <a:pPr lvl="1">
-              <a:spcAft>
-                <a:spcPts val="400"/>
-              </a:spcAft>
-            </a:pPr>
-            <a:r>
-              <a:rPr sz="1300" b="0">
-                <a:solidFill>
-                  <a:srgbClr val="222833"/>
-                </a:solidFill>
-                <a:latin typeface="Cambria"/>
-              </a:rPr>
-              <a:t>Writing Cypher queries for circular money-mule flows</a:t>
-            </a:r>
-          </a:p>
-          <a:p>
-            <a:pPr lvl="1">
-              <a:spcAft>
-                <a:spcPts val="400"/>
-              </a:spcAft>
-            </a:pPr>
-            <a:r>
-              <a:rPr sz="1300" b="0">
-                <a:solidFill>
-                  <a:srgbClr val="222833"/>
-                </a:solidFill>
-                <a:latin typeface="Cambria"/>
-              </a:rPr>
-              <a:t>Two defects the benchmark exposed: a repeated request returned</a:t>
-            </a:r>
-          </a:p>
-          <a:p>
-            <a:pPr lvl="1">
-              <a:spcAft>
-                <a:spcPts val="400"/>
-              </a:spcAft>
-            </a:pPr>
-            <a:r>
-              <a:rPr sz="1300" b="0">
-                <a:solidFill>
-                  <a:srgbClr val="222833"/>
-                </a:solidFill>
-                <a:latin typeface="Cambria"/>
-              </a:rPr>
-              <a:t>a server error, and a parsing fault silently zeroed the AI</a:t>
-            </a:r>
-          </a:p>
-          <a:p>
-            <a:pPr lvl="1">
-              <a:spcAft>
-                <a:spcPts val="400"/>
-              </a:spcAft>
-            </a:pPr>
-            <a:r>
-              <a:rPr sz="1300" b="0">
-                <a:solidFill>
-                  <a:srgbClr val="222833"/>
-                </a:solidFill>
-                <a:latin typeface="Cambria"/>
-              </a:rPr>
-              <a:t>score — both fixed and covered by tests</a:t>
-            </a:r>
-          </a:p>
-        </p:txBody>
-      </p:sp>
-      <p:sp>
-        <p:nvSpPr>
-          <p:cNvPr id="4" name="Content Placeholder 3"/>
-          <p:cNvSpPr>
-            <a:spLocks noGrp="1"/>
-          </p:cNvSpPr>
-          <p:nvPr>
-            <p:ph idx="2" sz="half"/>
-          </p:nvPr>
-        </p:nvSpPr>
-        <p:spPr/>
-        <p:txBody>
-          <a:bodyPr wrap="square"/>
-          <a:lstStyle/>
-          <a:p>
-            <a:pPr>
-              <a:spcAft>
-                <a:spcPts val="700"/>
-              </a:spcAft>
-            </a:pPr>
-            <a:r>
-              <a:rPr sz="1500" b="1">
-                <a:solidFill>
-                  <a:srgbClr val="2E7D32"/>
-                </a:solidFill>
-                <a:latin typeface="Cambria"/>
-              </a:rPr>
-              <a:t>Future work</a:t>
-            </a:r>
-          </a:p>
-          <a:p>
-            <a:pPr lvl="1">
-              <a:spcAft>
-                <a:spcPts val="400"/>
-              </a:spcAft>
-            </a:pPr>
-            <a:r>
-              <a:rPr sz="1300" b="0">
-                <a:solidFill>
-                  <a:srgbClr val="222833"/>
-                </a:solidFill>
-                <a:latin typeface="Cambria"/>
-              </a:rPr>
-              <a:t>Resolve the block-threshold trade-off from recorded scores</a:t>
-            </a:r>
-          </a:p>
-          <a:p>
-            <a:pPr lvl="1">
-              <a:spcAft>
-                <a:spcPts val="400"/>
-              </a:spcAft>
-            </a:pPr>
-            <a:r>
-              <a:rPr sz="1300" b="0">
-                <a:solidFill>
-                  <a:srgbClr val="222833"/>
-                </a:solidFill>
-                <a:latin typeface="Cambria"/>
-              </a:rPr>
-              <a:t>Add API authentication and request logging</a:t>
-            </a:r>
-          </a:p>
-          <a:p>
-            <a:pPr lvl="1">
-              <a:spcAft>
-                <a:spcPts val="400"/>
-              </a:spcAft>
-            </a:pPr>
-            <a:r>
-              <a:rPr sz="1300" b="0">
-                <a:solidFill>
-                  <a:srgbClr val="222833"/>
-                </a:solidFill>
-                <a:latin typeface="Cambria"/>
-              </a:rPr>
-              <a:t>Fraud-ring visualisation on the graph endpoint</a:t>
-            </a:r>
-          </a:p>
-          <a:p>
-            <a:pPr lvl="1">
-              <a:spcAft>
-                <a:spcPts val="400"/>
-              </a:spcAft>
-            </a:pPr>
-            <a:r>
-              <a:rPr sz="1300" b="0">
-                <a:solidFill>
-                  <a:srgbClr val="222833"/>
-                </a:solidFill>
-                <a:latin typeface="Cambria"/>
-              </a:rPr>
-              <a:t>Investigate the 7 undetected frauds; fan-in / fan-out patterns</a:t>
-            </a:r>
-          </a:p>
-          <a:p>
-            <a:pPr lvl="1">
-              <a:spcAft>
-                <a:spcPts val="400"/>
-              </a:spcAft>
-            </a:pPr>
-            <a:r>
-              <a:rPr sz="1300" b="0">
-                <a:solidFill>
-                  <a:srgbClr val="222833"/>
-                </a:solidFill>
-                <a:latin typeface="Cambria"/>
-              </a:rPr>
-              <a:t>Train a supervised classifier as a fourth signal</a:t>
-            </a:r>
-          </a:p>
-          <a:p>
-            <a:pPr lvl="1">
-              <a:spcAft>
-                <a:spcPts val="400"/>
-              </a:spcAft>
-            </a:pPr>
-            <a:r>
-              <a:rPr sz="1300" b="0">
-                <a:solidFill>
-                  <a:srgbClr val="222833"/>
-                </a:solidFill>
-                <a:latin typeface="Cambria"/>
-              </a:rPr>
-              <a:t>Reduce latency, presently dominated by the local model</a:t>
-            </a:r>
-          </a:p>
-        </p:txBody>
-      </p:sp>
-      <p:sp>
-        <p:nvSpPr>
-          <p:cNvPr id="5" name="TextBox 4"/>
-          <p:cNvSpPr txBox="1"/>
-          <p:nvPr/>
-        </p:nvSpPr>
-        <p:spPr>
-          <a:xfrm>
-            <a:off x="18288" y="109728"/>
-            <a:ext cx="8229600" cy="292608"/>
-          </a:xfrm>
-          <a:prstGeom prst="rect">
-            <a:avLst/>
-          </a:prstGeom>
-          <a:noFill/>
-        </p:spPr>
-        <p:txBody>
-          <a:bodyPr wrap="none">
-            <a:spAutoFit/>
-          </a:bodyPr>
-          <a:lstStyle/>
-          <a:p>
-            <a:r>
-              <a:rPr sz="1100" b="1">
-                <a:solidFill>
-                  <a:srgbClr val="028090"/>
-                </a:solidFill>
-                <a:latin typeface="Cambria"/>
-              </a:rPr>
-              <a:t>07 · CHALLENGES &amp; FUTURE WORK</a:t>
-            </a:r>
-          </a:p>
-        </p:txBody>
-      </p:sp>
-    </p:spTree>
-  </p:cSld>
-  <p:clrMapOvr>
-    <a:masterClrMapping/>
-  </p:clrMapOvr>
-</p:sld>
-</file>
-
-<file path=ppt/slides/slide11.xml><?xml version="1.0" encoding="utf-8"?>
-<p:sld xmlns:a="http://schemas.openxmlformats.org/drawingml/2006/main" xmlns:p="http://schemas.openxmlformats.org/presentationml/2006/main" xmlns:r="http://schemas.openxmlformats.org/officeDocument/2006/relationships">
-  <p:cSld>
-    <p:spTree>
-      <p:nvGrpSpPr>
-        <p:cNvPr id="1" name=""/>
-        <p:cNvGrpSpPr/>
-        <p:nvPr/>
-      </p:nvGrpSpPr>
-      <p:grpSpPr/>
-      <p:sp>
-        <p:nvSpPr>
-          <p:cNvPr id="2" name="Title 1"/>
-          <p:cNvSpPr>
-            <a:spLocks noGrp="1"/>
-          </p:cNvSpPr>
-          <p:nvPr>
-            <p:ph type="title"/>
-          </p:nvPr>
-        </p:nvSpPr>
-        <p:spPr/>
-        <p:txBody>
-          <a:bodyPr/>
-          <a:lstStyle/>
-          <a:p>
-            <a:r>
-              <a:rPr sz="2800" b="1">
-                <a:solidFill>
-                  <a:srgbClr val="002060"/>
-                </a:solidFill>
-                <a:latin typeface="Cambria"/>
-              </a:rPr>
-              <a:t>Conclusion — Where the Project Stands</a:t>
-            </a:r>
-          </a:p>
-        </p:txBody>
-      </p:sp>
-      <p:sp>
-        <p:nvSpPr>
-          <p:cNvPr id="3" name="Rounded Rectangle 2"/>
-          <p:cNvSpPr/>
-          <p:nvPr/>
-        </p:nvSpPr>
-        <p:spPr>
-          <a:xfrm>
-            <a:off x="457200" y="1828800"/>
-            <a:ext cx="2743200" cy="2834640"/>
-          </a:xfrm>
-          <a:prstGeom prst="roundRect">
-            <a:avLst/>
-          </a:prstGeom>
-          <a:solidFill>
-            <a:srgbClr val="F4F6FA"/>
-          </a:solidFill>
-          <a:ln>
-            <a:solidFill>
-              <a:srgbClr val="C7D0DE"/>
-            </a:solidFill>
-          </a:ln>
-          <a:effectLst/>
-        </p:spPr>
-        <p:style>
-          <a:lnRef idx="1">
-            <a:schemeClr val="accent1"/>
-          </a:lnRef>
-          <a:fillRef idx="3">
-            <a:schemeClr val="accent1"/>
-          </a:fillRef>
-          <a:effectRef idx="2">
-            <a:schemeClr val="accent1"/>
-          </a:effectRef>
-          <a:fontRef idx="minor">
-            <a:schemeClr val="lt1"/>
-          </a:fontRef>
-        </p:style>
-        <p:txBody>
-          <a:bodyPr rtlCol="0" anchor="ctr" wrap="square" lIns="146304" rIns="128016" tIns="182880"/>
-          <a:lstStyle/>
-          <a:p>
-            <a:pPr algn="ctr">
-              <a:spcAft>
-                <a:spcPts val="800"/>
-              </a:spcAft>
-            </a:pPr>
-            <a:r>
-              <a:rPr sz="1400" b="1">
-                <a:solidFill>
-                  <a:srgbClr val="002060"/>
-                </a:solidFill>
-                <a:latin typeface="Cambria"/>
-              </a:rPr>
-              <a:t>Measured, not asserted</a:t>
-            </a:r>
-          </a:p>
-          <a:p>
-            <a:pPr>
-              <a:spcAft>
-                <a:spcPts val="800"/>
-              </a:spcAft>
-            </a:pPr>
-            <a:r>
-              <a:rPr sz="1200" b="0">
-                <a:solidFill>
-                  <a:srgbClr val="222833"/>
-                </a:solidFill>
-                <a:latin typeface="Cambria"/>
-              </a:rPr>
-              <a:t>93.8% precision, 86.5% recall, F1 0.90 on 208 labelled transactions.</a:t>
-            </a:r>
-          </a:p>
-        </p:txBody>
-      </p:sp>
-      <p:sp>
-        <p:nvSpPr>
-          <p:cNvPr id="4" name="Rounded Rectangle 3"/>
-          <p:cNvSpPr/>
-          <p:nvPr/>
-        </p:nvSpPr>
-        <p:spPr>
-          <a:xfrm>
-            <a:off x="3447288" y="1828800"/>
-            <a:ext cx="2743200" cy="2834640"/>
-          </a:xfrm>
-          <a:prstGeom prst="roundRect">
-            <a:avLst/>
-          </a:prstGeom>
-          <a:solidFill>
-            <a:srgbClr val="F4F6FA"/>
-          </a:solidFill>
-          <a:ln>
-            <a:solidFill>
-              <a:srgbClr val="C7D0DE"/>
-            </a:solidFill>
-          </a:ln>
-          <a:effectLst/>
-        </p:spPr>
-        <p:style>
-          <a:lnRef idx="1">
-            <a:schemeClr val="accent1"/>
-          </a:lnRef>
-          <a:fillRef idx="3">
-            <a:schemeClr val="accent1"/>
-          </a:fillRef>
-          <a:effectRef idx="2">
-            <a:schemeClr val="accent1"/>
-          </a:effectRef>
-          <a:fontRef idx="minor">
-            <a:schemeClr val="lt1"/>
-          </a:fontRef>
-        </p:style>
-        <p:txBody>
-          <a:bodyPr rtlCol="0" anchor="ctr" wrap="square" lIns="146304" rIns="128016" tIns="182880"/>
-          <a:lstStyle/>
-          <a:p>
-            <a:pPr algn="ctr">
-              <a:spcAft>
-                <a:spcPts val="800"/>
-              </a:spcAft>
-            </a:pPr>
-            <a:r>
-              <a:rPr sz="1400" b="1">
-                <a:solidFill>
-                  <a:srgbClr val="028090"/>
-                </a:solidFill>
-                <a:latin typeface="Cambria"/>
-              </a:rPr>
-              <a:t>The graph layer earns its place</a:t>
-            </a:r>
-          </a:p>
-          <a:p>
-            <a:pPr>
-              <a:spcAft>
-                <a:spcPts val="800"/>
-              </a:spcAft>
-            </a:pPr>
-            <a:r>
-              <a:rPr sz="1200" b="0">
-                <a:solidFill>
-                  <a:srgbClr val="222833"/>
-                </a:solidFill>
-                <a:latin typeface="Cambria"/>
-              </a:rPr>
-              <a:t>All 36 planted mule-ring transactions were detected.</a:t>
-            </a:r>
-          </a:p>
-        </p:txBody>
-      </p:sp>
-      <p:sp>
-        <p:nvSpPr>
-          <p:cNvPr id="5" name="Rounded Rectangle 4"/>
-          <p:cNvSpPr/>
-          <p:nvPr/>
-        </p:nvSpPr>
-        <p:spPr>
-          <a:xfrm>
-            <a:off x="6437376" y="1828800"/>
-            <a:ext cx="2743200" cy="2834640"/>
-          </a:xfrm>
-          <a:prstGeom prst="roundRect">
-            <a:avLst/>
-          </a:prstGeom>
-          <a:solidFill>
-            <a:srgbClr val="F4F6FA"/>
-          </a:solidFill>
-          <a:ln>
-            <a:solidFill>
-              <a:srgbClr val="C7D0DE"/>
-            </a:solidFill>
-          </a:ln>
-          <a:effectLst/>
-        </p:spPr>
-        <p:style>
-          <a:lnRef idx="1">
-            <a:schemeClr val="accent1"/>
-          </a:lnRef>
-          <a:fillRef idx="3">
-            <a:schemeClr val="accent1"/>
-          </a:fillRef>
-          <a:effectRef idx="2">
-            <a:schemeClr val="accent1"/>
-          </a:effectRef>
-          <a:fontRef idx="minor">
-            <a:schemeClr val="lt1"/>
-          </a:fontRef>
-        </p:style>
-        <p:txBody>
-          <a:bodyPr rtlCol="0" anchor="ctr" wrap="square" lIns="146304" rIns="128016" tIns="182880"/>
-          <a:lstStyle/>
-          <a:p>
-            <a:pPr algn="ctr">
-              <a:spcAft>
-                <a:spcPts val="800"/>
-              </a:spcAft>
-            </a:pPr>
-            <a:r>
-              <a:rPr sz="1400" b="1">
-                <a:solidFill>
-                  <a:srgbClr val="C62828"/>
-                </a:solidFill>
-                <a:latin typeface="Cambria"/>
-              </a:rPr>
-              <a:t>A finding worth reporting</a:t>
-            </a:r>
-          </a:p>
-          <a:p>
-            <a:pPr>
-              <a:spcAft>
-                <a:spcPts val="800"/>
-              </a:spcAft>
-            </a:pPr>
-            <a:r>
-              <a:rPr sz="1200" b="0">
-                <a:solidFill>
-                  <a:srgbClr val="222833"/>
-                </a:solidFill>
-                <a:latin typeface="Cambria"/>
-              </a:rPr>
-              <a:t>Nothing reaches the block threshold; every catch reaches an analyst.</a:t>
-            </a:r>
-          </a:p>
-        </p:txBody>
-      </p:sp>
-      <p:sp>
-        <p:nvSpPr>
-          <p:cNvPr id="6" name="Rounded Rectangle 5"/>
-          <p:cNvSpPr/>
-          <p:nvPr/>
-        </p:nvSpPr>
-        <p:spPr>
-          <a:xfrm>
-            <a:off x="9427464" y="1828800"/>
-            <a:ext cx="2743200" cy="2834640"/>
-          </a:xfrm>
-          <a:prstGeom prst="roundRect">
-            <a:avLst/>
-          </a:prstGeom>
-          <a:solidFill>
-            <a:srgbClr val="F4F6FA"/>
-          </a:solidFill>
-          <a:ln>
-            <a:solidFill>
-              <a:srgbClr val="C7D0DE"/>
-            </a:solidFill>
-          </a:ln>
-          <a:effectLst/>
-        </p:spPr>
-        <p:style>
-          <a:lnRef idx="1">
-            <a:schemeClr val="accent1"/>
-          </a:lnRef>
-          <a:fillRef idx="3">
-            <a:schemeClr val="accent1"/>
-          </a:fillRef>
-          <a:effectRef idx="2">
-            <a:schemeClr val="accent1"/>
-          </a:effectRef>
-          <a:fontRef idx="minor">
-            <a:schemeClr val="lt1"/>
-          </a:fontRef>
-        </p:style>
-        <p:txBody>
-          <a:bodyPr rtlCol="0" anchor="ctr" wrap="square" lIns="146304" rIns="128016" tIns="182880"/>
-          <a:lstStyle/>
-          <a:p>
-            <a:pPr algn="ctr">
-              <a:spcAft>
-                <a:spcPts val="800"/>
-              </a:spcAft>
-            </a:pPr>
-            <a:r>
-              <a:rPr sz="1400" b="1">
-                <a:solidFill>
-                  <a:srgbClr val="2E7D32"/>
-                </a:solidFill>
-                <a:latin typeface="Cambria"/>
-              </a:rPr>
-              <a:t>Engineering discipline</a:t>
-            </a:r>
-          </a:p>
-          <a:p>
-            <a:pPr>
-              <a:spcAft>
-                <a:spcPts val="800"/>
-              </a:spcAft>
-            </a:pPr>
-            <a:r>
-              <a:rPr sz="1200" b="0">
-                <a:solidFill>
-                  <a:srgbClr val="222833"/>
-                </a:solidFill>
-                <a:latin typeface="Cambria"/>
-              </a:rPr>
-              <a:t>27 automated tests, continuous integration, one-command deployment.</a:t>
-            </a:r>
-          </a:p>
-        </p:txBody>
-      </p:sp>
-    </p:spTree>
-  </p:cSld>
-  <p:clrMapOvr>
-    <a:masterClrMapping/>
-  </p:clrMapOvr>
-</p:sld>
-</file>
-
-<file path=ppt/slides/slide12.xml><?xml version="1.0" encoding="utf-8"?>
-<p:sld xmlns:a="http://schemas.openxmlformats.org/drawingml/2006/main" xmlns:p="http://schemas.openxmlformats.org/presentationml/2006/main" xmlns:r="http://schemas.openxmlformats.org/officeDocument/2006/relationships">
-  <p:cSld>
-    <p:spTree>
-      <p:nvGrpSpPr>
-        <p:cNvPr id="1" name=""/>
-        <p:cNvGrpSpPr/>
-        <p:nvPr/>
-      </p:nvGrpSpPr>
-      <p:grpSpPr/>
-      <p:sp>
-        <p:nvSpPr>
-          <p:cNvPr id="2" name="Title 1"/>
-          <p:cNvSpPr>
-            <a:spLocks noGrp="1"/>
-          </p:cNvSpPr>
-          <p:nvPr>
-            <p:ph type="title"/>
-          </p:nvPr>
-        </p:nvSpPr>
-        <p:spPr/>
-        <p:txBody>
-          <a:bodyPr/>
-          <a:lstStyle/>
-          <a:p>
-            <a:r>
-              <a:rPr sz="2800" b="1">
-                <a:solidFill>
-                  <a:srgbClr val="002060"/>
-                </a:solidFill>
-                <a:latin typeface="Cambria"/>
-              </a:rPr>
-              <a:t>References</a:t>
-            </a:r>
-          </a:p>
-        </p:txBody>
-      </p:sp>
-      <p:sp>
-        <p:nvSpPr>
-          <p:cNvPr id="3" name="Content Placeholder 2"/>
-          <p:cNvSpPr>
-            <a:spLocks noGrp="1"/>
-          </p:cNvSpPr>
-          <p:nvPr>
-            <p:ph idx="1"/>
-          </p:nvPr>
-        </p:nvSpPr>
-        <p:spPr/>
-        <p:txBody>
-          <a:bodyPr wrap="square"/>
-          <a:lstStyle/>
-          <a:p>
-            <a:pPr>
-              <a:spcAft>
-                <a:spcPts val="700"/>
-              </a:spcAft>
-            </a:pPr>
-            <a:r>
-              <a:rPr sz="1300" b="0">
-                <a:solidFill>
-                  <a:srgbClr val="222833"/>
-                </a:solidFill>
-                <a:latin typeface="Cambria"/>
-              </a:rPr>
-              <a:t>[1]  Van Vlasselaer, V. et al. (2015). APATE: A novel approach for automated credit card transaction fraud detection using network-based extensions. Decision Support Systems, 75, 38–48.</a:t>
-            </a:r>
-          </a:p>
-          <a:p>
-            <a:pPr>
-              <a:spcAft>
-                <a:spcPts val="700"/>
-              </a:spcAft>
-            </a:pPr>
-            <a:r>
-              <a:rPr sz="1300" b="0">
-                <a:solidFill>
-                  <a:srgbClr val="222833"/>
-                </a:solidFill>
-                <a:latin typeface="Cambria"/>
-              </a:rPr>
-              <a:t>[2]  FICO. Falcon Fraud Manager — product documentation. fico.com.</a:t>
-            </a:r>
-          </a:p>
-          <a:p>
-            <a:pPr>
-              <a:spcAft>
-                <a:spcPts val="700"/>
-              </a:spcAft>
-            </a:pPr>
-            <a:r>
-              <a:rPr sz="1300" b="0">
-                <a:solidFill>
-                  <a:srgbClr val="222833"/>
-                </a:solidFill>
-                <a:latin typeface="Cambria"/>
-              </a:rPr>
-              <a:t>[3]  Feedzai. RiskOps platform overview. feedzai.com.</a:t>
-            </a:r>
-          </a:p>
-          <a:p>
-            <a:pPr>
-              <a:spcAft>
-                <a:spcPts val="700"/>
-              </a:spcAft>
-            </a:pPr>
-            <a:r>
-              <a:rPr sz="1300" b="0">
-                <a:solidFill>
-                  <a:srgbClr val="222833"/>
-                </a:solidFill>
-                <a:latin typeface="Cambria"/>
-              </a:rPr>
-              <a:t>[4]  Featurespace. ARIC Risk Hub — adaptive behavioural analytics. featurespace.com.</a:t>
-            </a:r>
-          </a:p>
-          <a:p>
-            <a:pPr>
-              <a:spcAft>
-                <a:spcPts val="700"/>
-              </a:spcAft>
-            </a:pPr>
-            <a:r>
-              <a:rPr sz="1300" b="0">
-                <a:solidFill>
-                  <a:srgbClr val="222833"/>
-                </a:solidFill>
-                <a:latin typeface="Cambria"/>
-              </a:rPr>
-              <a:t>[5]  Neo4j. Graph algorithms for fraud detection — developer guide. neo4j.com.</a:t>
-            </a:r>
-          </a:p>
-          <a:p>
-            <a:pPr>
-              <a:spcAft>
-                <a:spcPts val="700"/>
-              </a:spcAft>
-            </a:pPr>
-            <a:r>
-              <a:rPr sz="1300" b="0">
-                <a:solidFill>
-                  <a:srgbClr val="222833"/>
-                </a:solidFill>
-                <a:latin typeface="Cambria"/>
-              </a:rPr>
-              <a:t>[6]  LangChain &amp; ChromaDB documentation — retrieval-augmented generation.</a:t>
-            </a:r>
-          </a:p>
-        </p:txBody>
-      </p:sp>
-    </p:spTree>
-  </p:cSld>
-  <p:clrMapOvr>
-    <a:masterClrMapping/>
-  </p:clrMapOvr>
-</p:sld>
-</file>
-
-<file path=ppt/slides/slide13.xml><?xml version="1.0" encoding="utf-8"?>
-<p:sld xmlns:a="http://schemas.openxmlformats.org/drawingml/2006/main" xmlns:p="http://schemas.openxmlformats.org/presentationml/2006/main" xmlns:r="http://schemas.openxmlformats.org/officeDocument/2006/relationships">
-  <p:cSld>
-    <p:spTree>
-      <p:nvGrpSpPr>
-        <p:cNvPr id="1" name=""/>
-        <p:cNvGrpSpPr/>
-        <p:nvPr/>
-      </p:nvGrpSpPr>
-      <p:grpSpPr/>
-      <p:sp>
-        <p:nvSpPr>
-          <p:cNvPr id="2" name="Title 1"/>
-          <p:cNvSpPr>
-            <a:spLocks noGrp="1"/>
-          </p:cNvSpPr>
-          <p:nvPr>
-            <p:ph type="title"/>
-          </p:nvPr>
-        </p:nvSpPr>
-        <p:spPr/>
-        <p:txBody>
-          <a:bodyPr/>
-          <a:lstStyle/>
-          <a:p>
-            <a:r>
-              <a:rPr sz="2800" b="1">
-                <a:solidFill>
-                  <a:srgbClr val="002060"/>
-                </a:solidFill>
-                <a:latin typeface="Cambria"/>
-              </a:rPr>
-              <a:t/>
-            </a:r>
-          </a:p>
-        </p:txBody>
-      </p:sp>
-      <p:sp>
-        <p:nvSpPr>
-          <p:cNvPr id="3" name="TextBox 2"/>
-          <p:cNvSpPr txBox="1"/>
-          <p:nvPr/>
-        </p:nvSpPr>
-        <p:spPr>
-          <a:xfrm>
-            <a:off x="1371600" y="2377440"/>
-            <a:ext cx="9418320" cy="2011680"/>
-          </a:xfrm>
-          <a:prstGeom prst="rect">
-            <a:avLst/>
-          </a:prstGeom>
-          <a:noFill/>
-        </p:spPr>
-        <p:txBody>
-          <a:bodyPr wrap="square" lIns="73152" rIns="73152" anchor="ctr">
-            <a:spAutoFit/>
-          </a:bodyPr>
-          <a:lstStyle/>
-          <a:p>
-            <a:pPr algn="ctr">
-              <a:spcAft>
-                <a:spcPts val="1000"/>
-              </a:spcAft>
-            </a:pPr>
-            <a:r>
-              <a:rPr sz="4800" b="1">
-                <a:solidFill>
-                  <a:srgbClr val="002060"/>
-                </a:solidFill>
-                <a:latin typeface="Cambria"/>
-              </a:rPr>
-              <a:t>Thank You</a:t>
-            </a:r>
-          </a:p>
-          <a:p>
-            <a:pPr algn="ctr">
-              <a:spcAft>
-                <a:spcPts val="400"/>
-              </a:spcAft>
-            </a:pPr>
-            <a:r>
-              <a:rPr sz="2000" b="0">
-                <a:solidFill>
-                  <a:srgbClr val="555B66"/>
-                </a:solidFill>
-                <a:latin typeface="Cambria"/>
-              </a:rPr>
-              <a:t>Questions · Suggestions · Comments</a:t>
-            </a:r>
-          </a:p>
-          <a:p>
-            <a:pPr algn="ctr">
-              <a:spcAft>
-                <a:spcPts val="400"/>
-              </a:spcAft>
-            </a:pPr>
-            <a:r>
-              <a:rPr sz="1400" b="0">
-                <a:solidFill>
-                  <a:srgbClr val="222833"/>
-                </a:solidFill>
-                <a:latin typeface="Cambria"/>
-              </a:rPr>
-              <a:t>Joshi Om · Krish Gajera · Drashti Dedaniya  —  CHARUSAT · DEPSTAR</a:t>
-            </a:r>
-          </a:p>
-        </p:txBody>
-      </p:sp>
-    </p:spTree>
-  </p:cSld>
-  <p:clrMapOvr>
-    <a:masterClrMapping/>
-  </p:clrMapOvr>
-</p:sld>
-</file>
-
-<file path=ppt/slides/slide14.xml><?xml version="1.0" encoding="utf-8"?>
-<p:sld xmlns:a="http://schemas.openxmlformats.org/drawingml/2006/main" xmlns:p="http://schemas.openxmlformats.org/presentationml/2006/main" xmlns:r="http://schemas.openxmlformats.org/officeDocument/2006/relationships">
-  <p:cSld>
-    <p:spTree>
-      <p:nvGrpSpPr>
-        <p:cNvPr id="1" name=""/>
-        <p:cNvGrpSpPr/>
-        <p:nvPr/>
-      </p:nvGrpSpPr>
-      <p:grpSpPr/>
-      <p:sp>
-        <p:nvSpPr>
-          <p:cNvPr id="2" name="Title 1"/>
-          <p:cNvSpPr>
-            <a:spLocks noGrp="1"/>
-          </p:cNvSpPr>
-          <p:nvPr>
-            <p:ph type="title"/>
-          </p:nvPr>
-        </p:nvSpPr>
-        <p:spPr/>
-        <p:txBody>
-          <a:bodyPr/>
-          <a:lstStyle/>
-          <a:p>
-            <a:r>
-              <a:rPr sz="2800" b="1">
-                <a:solidFill>
-                  <a:srgbClr val="002060"/>
-                </a:solidFill>
-                <a:latin typeface="Cambria"/>
-              </a:rPr>
               <a:t>Detection Accuracy — Measured Results</a:t>
             </a:r>
           </a:p>
@@ -6380,6 +5429,1977 @@
 </p:sld>
 </file>
 
+<file path=ppt/slides/slide11.xml><?xml version="1.0" encoding="utf-8"?>
+<p:sld xmlns:a="http://schemas.openxmlformats.org/drawingml/2006/main" xmlns:p="http://schemas.openxmlformats.org/presentationml/2006/main" xmlns:r="http://schemas.openxmlformats.org/officeDocument/2006/relationships">
+  <p:cSld>
+    <p:spTree>
+      <p:nvGrpSpPr>
+        <p:cNvPr id="1" name=""/>
+        <p:cNvGrpSpPr/>
+        <p:nvPr/>
+      </p:nvGrpSpPr>
+      <p:grpSpPr/>
+      <p:sp>
+        <p:nvSpPr>
+          <p:cNvPr id="2" name="Title 1"/>
+          <p:cNvSpPr>
+            <a:spLocks noGrp="1"/>
+          </p:cNvSpPr>
+          <p:nvPr>
+            <p:ph type="title"/>
+          </p:nvPr>
+        </p:nvSpPr>
+        <p:spPr/>
+        <p:txBody>
+          <a:bodyPr/>
+          <a:lstStyle/>
+          <a:p>
+            <a:r>
+              <a:rPr sz="2800" b="1">
+                <a:solidFill>
+                  <a:srgbClr val="002060"/>
+                </a:solidFill>
+                <a:latin typeface="Cambria"/>
+              </a:rPr>
+              <a:t>Progress Since the Last Review</a:t>
+            </a:r>
+          </a:p>
+        </p:txBody>
+      </p:sp>
+      <p:sp>
+        <p:nvSpPr>
+          <p:cNvPr id="3" name="Content Placeholder 2"/>
+          <p:cNvSpPr>
+            <a:spLocks noGrp="1"/>
+          </p:cNvSpPr>
+          <p:nvPr>
+            <p:ph idx="1" sz="half"/>
+          </p:nvPr>
+        </p:nvSpPr>
+        <p:spPr/>
+        <p:txBody>
+          <a:bodyPr wrap="square"/>
+          <a:lstStyle/>
+          <a:p>
+            <a:pPr>
+              <a:spcAft>
+                <a:spcPts val="700"/>
+              </a:spcAft>
+            </a:pPr>
+            <a:r>
+              <a:rPr sz="1500" b="1">
+                <a:solidFill>
+                  <a:srgbClr val="002060"/>
+                </a:solidFill>
+                <a:latin typeface="Cambria"/>
+              </a:rPr>
+              <a:t>Specification</a:t>
+            </a:r>
+          </a:p>
+          <a:p>
+            <a:pPr lvl="1">
+              <a:spcAft>
+                <a:spcPts val="500"/>
+              </a:spcAft>
+            </a:pPr>
+            <a:r>
+              <a:rPr sz="1300" b="0">
+                <a:solidFill>
+                  <a:srgbClr val="222833"/>
+                </a:solidFill>
+                <a:latin typeface="Cambria"/>
+              </a:rPr>
+              <a:t>Front matter numbered in roman (i-ix); body restarts at 1</a:t>
+            </a:r>
+          </a:p>
+          <a:p>
+            <a:pPr lvl="1">
+              <a:spcAft>
+                <a:spcPts val="500"/>
+              </a:spcAft>
+            </a:pPr>
+            <a:r>
+              <a:rPr sz="1300" b="0">
+                <a:solidFill>
+                  <a:srgbClr val="222833"/>
+                </a:solidFill>
+                <a:latin typeface="Cambria"/>
+              </a:rPr>
+              <a:t>Every reference cited in the text at its point of use, IEEE style</a:t>
+            </a:r>
+          </a:p>
+          <a:p>
+            <a:pPr lvl="1">
+              <a:spcAft>
+                <a:spcPts val="500"/>
+              </a:spcAft>
+            </a:pPr>
+            <a:r>
+              <a:rPr sz="1300" b="0">
+                <a:solidFill>
+                  <a:srgbClr val="222833"/>
+                </a:solidFill>
+                <a:latin typeface="Cambria"/>
+              </a:rPr>
+              <a:t>Tables restyled — caption above, columns sized to content, none split across a page break</a:t>
+            </a:r>
+          </a:p>
+          <a:p>
+            <a:pPr lvl="1">
+              <a:spcAft>
+                <a:spcPts val="500"/>
+              </a:spcAft>
+            </a:pPr>
+            <a:r>
+              <a:rPr sz="1300" b="0">
+                <a:solidFill>
+                  <a:srgbClr val="222833"/>
+                </a:solidFill>
+                <a:latin typeface="Cambria"/>
+              </a:rPr>
+              <a:t>32 functional requirements consolidated to 28 real, distinct ones</a:t>
+            </a:r>
+          </a:p>
+          <a:p>
+            <a:pPr lvl="1">
+              <a:spcAft>
+                <a:spcPts val="500"/>
+              </a:spcAft>
+            </a:pPr>
+            <a:r>
+              <a:rPr sz="1300" b="0">
+                <a:solidFill>
+                  <a:srgbClr val="222833"/>
+                </a:solidFill>
+                <a:latin typeface="Cambria"/>
+              </a:rPr>
+              <a:t>Diagram set re-checked against the guide's notation comments and against the running code</a:t>
+            </a:r>
+          </a:p>
+        </p:txBody>
+      </p:sp>
+      <p:sp>
+        <p:nvSpPr>
+          <p:cNvPr id="4" name="Content Placeholder 3"/>
+          <p:cNvSpPr>
+            <a:spLocks noGrp="1"/>
+          </p:cNvSpPr>
+          <p:nvPr>
+            <p:ph idx="2" sz="half"/>
+          </p:nvPr>
+        </p:nvSpPr>
+        <p:spPr/>
+        <p:txBody>
+          <a:bodyPr wrap="square"/>
+          <a:lstStyle/>
+          <a:p>
+            <a:pPr>
+              <a:spcAft>
+                <a:spcPts val="700"/>
+              </a:spcAft>
+            </a:pPr>
+            <a:r>
+              <a:rPr sz="1500" b="1">
+                <a:solidFill>
+                  <a:srgbClr val="028090"/>
+                </a:solidFill>
+                <a:latin typeface="Cambria"/>
+              </a:rPr>
+              <a:t>Product</a:t>
+            </a:r>
+          </a:p>
+          <a:p>
+            <a:pPr lvl="1">
+              <a:spcAft>
+                <a:spcPts val="500"/>
+              </a:spcAft>
+            </a:pPr>
+            <a:r>
+              <a:rPr sz="1300" b="0">
+                <a:solidFill>
+                  <a:srgbClr val="222833"/>
+                </a:solidFill>
+                <a:latin typeface="Cambria"/>
+              </a:rPr>
+              <a:t>Flagged-transactions table made interactive — filters, search, sortable columns</a:t>
+            </a:r>
+          </a:p>
+          <a:p>
+            <a:pPr lvl="1">
+              <a:spcAft>
+                <a:spcPts val="500"/>
+              </a:spcAft>
+            </a:pPr>
+            <a:r>
+              <a:rPr sz="1300" b="0">
+                <a:solidFill>
+                  <a:srgbClr val="222833"/>
+                </a:solidFill>
+                <a:latin typeface="Cambria"/>
+              </a:rPr>
+              <a:t>Entrance and count-up motion, with an automatic reduced-motion fallback</a:t>
+            </a:r>
+          </a:p>
+          <a:p>
+            <a:pPr lvl="1">
+              <a:spcAft>
+                <a:spcPts val="500"/>
+              </a:spcAft>
+            </a:pPr>
+            <a:r>
+              <a:rPr sz="1300" b="0">
+                <a:solidFill>
+                  <a:srgbClr val="222833"/>
+                </a:solidFill>
+                <a:latin typeface="Cambria"/>
+              </a:rPr>
+              <a:t>Static demo mode: the dashboard runs from a snapshot with no live backend</a:t>
+            </a:r>
+          </a:p>
+          <a:p>
+            <a:pPr lvl="1">
+              <a:spcAft>
+                <a:spcPts val="500"/>
+              </a:spcAft>
+            </a:pPr>
+            <a:r>
+              <a:rPr sz="1300" b="0">
+                <a:solidFill>
+                  <a:srgbClr val="222833"/>
+                </a:solidFill>
+                <a:latin typeface="Cambria"/>
+              </a:rPr>
+              <a:t>Weekly-report generator with an automatic duplicate-reference check across weeks</a:t>
+            </a:r>
+          </a:p>
+        </p:txBody>
+      </p:sp>
+    </p:spTree>
+  </p:cSld>
+  <p:clrMapOvr>
+    <a:masterClrMapping/>
+  </p:clrMapOvr>
+</p:sld>
+</file>
+
+<file path=ppt/slides/slide12.xml><?xml version="1.0" encoding="utf-8"?>
+<p:sld xmlns:a="http://schemas.openxmlformats.org/drawingml/2006/main" xmlns:p="http://schemas.openxmlformats.org/presentationml/2006/main" xmlns:r="http://schemas.openxmlformats.org/officeDocument/2006/relationships">
+  <p:cSld>
+    <p:spTree>
+      <p:nvGrpSpPr>
+        <p:cNvPr id="1" name=""/>
+        <p:cNvGrpSpPr/>
+        <p:nvPr/>
+      </p:nvGrpSpPr>
+      <p:grpSpPr/>
+      <p:sp>
+        <p:nvSpPr>
+          <p:cNvPr id="2" name="Title 1"/>
+          <p:cNvSpPr>
+            <a:spLocks noGrp="1"/>
+          </p:cNvSpPr>
+          <p:nvPr>
+            <p:ph type="title"/>
+          </p:nvPr>
+        </p:nvSpPr>
+        <p:spPr/>
+        <p:txBody>
+          <a:bodyPr/>
+          <a:lstStyle/>
+          <a:p>
+            <a:r>
+              <a:rPr sz="2800" b="1">
+                <a:solidFill>
+                  <a:srgbClr val="002060"/>
+                </a:solidFill>
+                <a:latin typeface="Cambria"/>
+              </a:rPr>
+              <a:t>Challenges Faced &amp; Future Work</a:t>
+            </a:r>
+          </a:p>
+        </p:txBody>
+      </p:sp>
+      <p:sp>
+        <p:nvSpPr>
+          <p:cNvPr id="3" name="Content Placeholder 2"/>
+          <p:cNvSpPr>
+            <a:spLocks noGrp="1"/>
+          </p:cNvSpPr>
+          <p:nvPr>
+            <p:ph idx="1" sz="half"/>
+          </p:nvPr>
+        </p:nvSpPr>
+        <p:spPr/>
+        <p:txBody>
+          <a:bodyPr wrap="square"/>
+          <a:lstStyle/>
+          <a:p>
+            <a:pPr>
+              <a:spcAft>
+                <a:spcPts val="700"/>
+              </a:spcAft>
+            </a:pPr>
+            <a:r>
+              <a:rPr sz="1500" b="1">
+                <a:solidFill>
+                  <a:srgbClr val="B26A00"/>
+                </a:solidFill>
+                <a:latin typeface="Cambria"/>
+              </a:rPr>
+              <a:t>Challenges faced</a:t>
+            </a:r>
+          </a:p>
+          <a:p>
+            <a:pPr lvl="1">
+              <a:spcAft>
+                <a:spcPts val="400"/>
+              </a:spcAft>
+            </a:pPr>
+            <a:r>
+              <a:rPr sz="1300" b="0">
+                <a:solidFill>
+                  <a:srgbClr val="222833"/>
+                </a:solidFill>
+                <a:latin typeface="Cambria"/>
+              </a:rPr>
+              <a:t>Coordinating four data stores on one machine</a:t>
+            </a:r>
+          </a:p>
+          <a:p>
+            <a:pPr lvl="1">
+              <a:spcAft>
+                <a:spcPts val="400"/>
+              </a:spcAft>
+            </a:pPr>
+            <a:r>
+              <a:rPr sz="1300" b="0">
+                <a:solidFill>
+                  <a:srgbClr val="222833"/>
+                </a:solidFill>
+                <a:latin typeface="Cambria"/>
+              </a:rPr>
+              <a:t>Keeping model output consistent — solved with a 30-point cap</a:t>
+            </a:r>
+          </a:p>
+          <a:p>
+            <a:pPr lvl="1">
+              <a:spcAft>
+                <a:spcPts val="400"/>
+              </a:spcAft>
+            </a:pPr>
+            <a:r>
+              <a:rPr sz="1300" b="0">
+                <a:solidFill>
+                  <a:srgbClr val="222833"/>
+                </a:solidFill>
+                <a:latin typeface="Cambria"/>
+              </a:rPr>
+              <a:t>Writing Cypher queries for circular money-mule flows</a:t>
+            </a:r>
+          </a:p>
+          <a:p>
+            <a:pPr lvl="1">
+              <a:spcAft>
+                <a:spcPts val="400"/>
+              </a:spcAft>
+            </a:pPr>
+            <a:r>
+              <a:rPr sz="1300" b="0">
+                <a:solidFill>
+                  <a:srgbClr val="222833"/>
+                </a:solidFill>
+                <a:latin typeface="Cambria"/>
+              </a:rPr>
+              <a:t>Two defects the benchmark exposed: a repeated request returned</a:t>
+            </a:r>
+          </a:p>
+          <a:p>
+            <a:pPr lvl="1">
+              <a:spcAft>
+                <a:spcPts val="400"/>
+              </a:spcAft>
+            </a:pPr>
+            <a:r>
+              <a:rPr sz="1300" b="0">
+                <a:solidFill>
+                  <a:srgbClr val="222833"/>
+                </a:solidFill>
+                <a:latin typeface="Cambria"/>
+              </a:rPr>
+              <a:t>a server error, and a parsing fault silently zeroed the AI</a:t>
+            </a:r>
+          </a:p>
+          <a:p>
+            <a:pPr lvl="1">
+              <a:spcAft>
+                <a:spcPts val="400"/>
+              </a:spcAft>
+            </a:pPr>
+            <a:r>
+              <a:rPr sz="1300" b="0">
+                <a:solidFill>
+                  <a:srgbClr val="222833"/>
+                </a:solidFill>
+                <a:latin typeface="Cambria"/>
+              </a:rPr>
+              <a:t>score — both fixed and covered by tests</a:t>
+            </a:r>
+          </a:p>
+        </p:txBody>
+      </p:sp>
+      <p:sp>
+        <p:nvSpPr>
+          <p:cNvPr id="4" name="Content Placeholder 3"/>
+          <p:cNvSpPr>
+            <a:spLocks noGrp="1"/>
+          </p:cNvSpPr>
+          <p:nvPr>
+            <p:ph idx="2" sz="half"/>
+          </p:nvPr>
+        </p:nvSpPr>
+        <p:spPr/>
+        <p:txBody>
+          <a:bodyPr wrap="square"/>
+          <a:lstStyle/>
+          <a:p>
+            <a:pPr>
+              <a:spcAft>
+                <a:spcPts val="700"/>
+              </a:spcAft>
+            </a:pPr>
+            <a:r>
+              <a:rPr sz="1500" b="1">
+                <a:solidFill>
+                  <a:srgbClr val="2E7D32"/>
+                </a:solidFill>
+                <a:latin typeface="Cambria"/>
+              </a:rPr>
+              <a:t>Future work</a:t>
+            </a:r>
+          </a:p>
+          <a:p>
+            <a:pPr lvl="1">
+              <a:spcAft>
+                <a:spcPts val="400"/>
+              </a:spcAft>
+            </a:pPr>
+            <a:r>
+              <a:rPr sz="1300" b="0">
+                <a:solidFill>
+                  <a:srgbClr val="222833"/>
+                </a:solidFill>
+                <a:latin typeface="Cambria"/>
+              </a:rPr>
+              <a:t>Resolve the block-threshold trade-off from recorded scores</a:t>
+            </a:r>
+          </a:p>
+          <a:p>
+            <a:pPr lvl="1">
+              <a:spcAft>
+                <a:spcPts val="400"/>
+              </a:spcAft>
+            </a:pPr>
+            <a:r>
+              <a:rPr sz="1300" b="0">
+                <a:solidFill>
+                  <a:srgbClr val="222833"/>
+                </a:solidFill>
+                <a:latin typeface="Cambria"/>
+              </a:rPr>
+              <a:t>Add API authentication and request logging</a:t>
+            </a:r>
+          </a:p>
+          <a:p>
+            <a:pPr lvl="1">
+              <a:spcAft>
+                <a:spcPts val="400"/>
+              </a:spcAft>
+            </a:pPr>
+            <a:r>
+              <a:rPr sz="1300" b="0">
+                <a:solidFill>
+                  <a:srgbClr val="222833"/>
+                </a:solidFill>
+                <a:latin typeface="Cambria"/>
+              </a:rPr>
+              <a:t>Fraud-ring visualisation on the graph endpoint</a:t>
+            </a:r>
+          </a:p>
+          <a:p>
+            <a:pPr lvl="1">
+              <a:spcAft>
+                <a:spcPts val="400"/>
+              </a:spcAft>
+            </a:pPr>
+            <a:r>
+              <a:rPr sz="1300" b="0">
+                <a:solidFill>
+                  <a:srgbClr val="222833"/>
+                </a:solidFill>
+                <a:latin typeface="Cambria"/>
+              </a:rPr>
+              <a:t>Investigate the 7 undetected frauds; fan-in / fan-out patterns</a:t>
+            </a:r>
+          </a:p>
+          <a:p>
+            <a:pPr lvl="1">
+              <a:spcAft>
+                <a:spcPts val="400"/>
+              </a:spcAft>
+            </a:pPr>
+            <a:r>
+              <a:rPr sz="1300" b="0">
+                <a:solidFill>
+                  <a:srgbClr val="222833"/>
+                </a:solidFill>
+                <a:latin typeface="Cambria"/>
+              </a:rPr>
+              <a:t>Train a supervised classifier as a fourth signal</a:t>
+            </a:r>
+          </a:p>
+          <a:p>
+            <a:pPr lvl="1">
+              <a:spcAft>
+                <a:spcPts val="400"/>
+              </a:spcAft>
+            </a:pPr>
+            <a:r>
+              <a:rPr sz="1300" b="0">
+                <a:solidFill>
+                  <a:srgbClr val="222833"/>
+                </a:solidFill>
+                <a:latin typeface="Cambria"/>
+              </a:rPr>
+              <a:t>Reduce latency, presently dominated by the local model</a:t>
+            </a:r>
+          </a:p>
+        </p:txBody>
+      </p:sp>
+      <p:sp>
+        <p:nvSpPr>
+          <p:cNvPr id="5" name="TextBox 4"/>
+          <p:cNvSpPr txBox="1"/>
+          <p:nvPr/>
+        </p:nvSpPr>
+        <p:spPr>
+          <a:xfrm>
+            <a:off x="18288" y="109728"/>
+            <a:ext cx="8229600" cy="292608"/>
+          </a:xfrm>
+          <a:prstGeom prst="rect">
+            <a:avLst/>
+          </a:prstGeom>
+          <a:noFill/>
+        </p:spPr>
+        <p:txBody>
+          <a:bodyPr wrap="none">
+            <a:spAutoFit/>
+          </a:bodyPr>
+          <a:lstStyle/>
+          <a:p>
+            <a:r>
+              <a:rPr sz="1100" b="1">
+                <a:solidFill>
+                  <a:srgbClr val="028090"/>
+                </a:solidFill>
+                <a:latin typeface="Cambria"/>
+              </a:rPr>
+              <a:t>07 · CHALLENGES &amp; FUTURE WORK</a:t>
+            </a:r>
+          </a:p>
+        </p:txBody>
+      </p:sp>
+    </p:spTree>
+  </p:cSld>
+  <p:clrMapOvr>
+    <a:masterClrMapping/>
+  </p:clrMapOvr>
+</p:sld>
+</file>
+
+<file path=ppt/slides/slide13.xml><?xml version="1.0" encoding="utf-8"?>
+<p:sld xmlns:a="http://schemas.openxmlformats.org/drawingml/2006/main" xmlns:p="http://schemas.openxmlformats.org/presentationml/2006/main" xmlns:r="http://schemas.openxmlformats.org/officeDocument/2006/relationships">
+  <p:cSld>
+    <p:spTree>
+      <p:nvGrpSpPr>
+        <p:cNvPr id="1" name=""/>
+        <p:cNvGrpSpPr/>
+        <p:nvPr/>
+      </p:nvGrpSpPr>
+      <p:grpSpPr/>
+      <p:sp>
+        <p:nvSpPr>
+          <p:cNvPr id="2" name="Title 1"/>
+          <p:cNvSpPr>
+            <a:spLocks noGrp="1"/>
+          </p:cNvSpPr>
+          <p:nvPr>
+            <p:ph type="title"/>
+          </p:nvPr>
+        </p:nvSpPr>
+        <p:spPr/>
+        <p:txBody>
+          <a:bodyPr/>
+          <a:lstStyle/>
+          <a:p>
+            <a:r>
+              <a:rPr sz="2800" b="1">
+                <a:solidFill>
+                  <a:srgbClr val="002060"/>
+                </a:solidFill>
+                <a:latin typeface="Cambria"/>
+              </a:rPr>
+              <a:t>Conclusion — Where the Project Stands</a:t>
+            </a:r>
+          </a:p>
+        </p:txBody>
+      </p:sp>
+      <p:sp>
+        <p:nvSpPr>
+          <p:cNvPr id="3" name="Rounded Rectangle 2"/>
+          <p:cNvSpPr/>
+          <p:nvPr/>
+        </p:nvSpPr>
+        <p:spPr>
+          <a:xfrm>
+            <a:off x="457200" y="1828800"/>
+            <a:ext cx="2743200" cy="2834640"/>
+          </a:xfrm>
+          <a:prstGeom prst="roundRect">
+            <a:avLst/>
+          </a:prstGeom>
+          <a:solidFill>
+            <a:srgbClr val="F4F6FA"/>
+          </a:solidFill>
+          <a:ln>
+            <a:solidFill>
+              <a:srgbClr val="C7D0DE"/>
+            </a:solidFill>
+          </a:ln>
+          <a:effectLst/>
+        </p:spPr>
+        <p:style>
+          <a:lnRef idx="1">
+            <a:schemeClr val="accent1"/>
+          </a:lnRef>
+          <a:fillRef idx="3">
+            <a:schemeClr val="accent1"/>
+          </a:fillRef>
+          <a:effectRef idx="2">
+            <a:schemeClr val="accent1"/>
+          </a:effectRef>
+          <a:fontRef idx="minor">
+            <a:schemeClr val="lt1"/>
+          </a:fontRef>
+        </p:style>
+        <p:txBody>
+          <a:bodyPr rtlCol="0" anchor="ctr" wrap="square" lIns="146304" rIns="128016" tIns="182880"/>
+          <a:lstStyle/>
+          <a:p>
+            <a:pPr algn="ctr">
+              <a:spcAft>
+                <a:spcPts val="800"/>
+              </a:spcAft>
+            </a:pPr>
+            <a:r>
+              <a:rPr sz="1400" b="1">
+                <a:solidFill>
+                  <a:srgbClr val="002060"/>
+                </a:solidFill>
+                <a:latin typeface="Cambria"/>
+              </a:rPr>
+              <a:t>Measured, not asserted</a:t>
+            </a:r>
+          </a:p>
+          <a:p>
+            <a:pPr>
+              <a:spcAft>
+                <a:spcPts val="800"/>
+              </a:spcAft>
+            </a:pPr>
+            <a:r>
+              <a:rPr sz="1200" b="0">
+                <a:solidFill>
+                  <a:srgbClr val="222833"/>
+                </a:solidFill>
+                <a:latin typeface="Cambria"/>
+              </a:rPr>
+              <a:t>93.8% precision, 86.5% recall, F1 0.90 on 208 labelled transactions.</a:t>
+            </a:r>
+          </a:p>
+        </p:txBody>
+      </p:sp>
+      <p:sp>
+        <p:nvSpPr>
+          <p:cNvPr id="4" name="Rounded Rectangle 3"/>
+          <p:cNvSpPr/>
+          <p:nvPr/>
+        </p:nvSpPr>
+        <p:spPr>
+          <a:xfrm>
+            <a:off x="3447288" y="1828800"/>
+            <a:ext cx="2743200" cy="2834640"/>
+          </a:xfrm>
+          <a:prstGeom prst="roundRect">
+            <a:avLst/>
+          </a:prstGeom>
+          <a:solidFill>
+            <a:srgbClr val="F4F6FA"/>
+          </a:solidFill>
+          <a:ln>
+            <a:solidFill>
+              <a:srgbClr val="C7D0DE"/>
+            </a:solidFill>
+          </a:ln>
+          <a:effectLst/>
+        </p:spPr>
+        <p:style>
+          <a:lnRef idx="1">
+            <a:schemeClr val="accent1"/>
+          </a:lnRef>
+          <a:fillRef idx="3">
+            <a:schemeClr val="accent1"/>
+          </a:fillRef>
+          <a:effectRef idx="2">
+            <a:schemeClr val="accent1"/>
+          </a:effectRef>
+          <a:fontRef idx="minor">
+            <a:schemeClr val="lt1"/>
+          </a:fontRef>
+        </p:style>
+        <p:txBody>
+          <a:bodyPr rtlCol="0" anchor="ctr" wrap="square" lIns="146304" rIns="128016" tIns="182880"/>
+          <a:lstStyle/>
+          <a:p>
+            <a:pPr algn="ctr">
+              <a:spcAft>
+                <a:spcPts val="800"/>
+              </a:spcAft>
+            </a:pPr>
+            <a:r>
+              <a:rPr sz="1400" b="1">
+                <a:solidFill>
+                  <a:srgbClr val="028090"/>
+                </a:solidFill>
+                <a:latin typeface="Cambria"/>
+              </a:rPr>
+              <a:t>The graph layer earns its place</a:t>
+            </a:r>
+          </a:p>
+          <a:p>
+            <a:pPr>
+              <a:spcAft>
+                <a:spcPts val="800"/>
+              </a:spcAft>
+            </a:pPr>
+            <a:r>
+              <a:rPr sz="1200" b="0">
+                <a:solidFill>
+                  <a:srgbClr val="222833"/>
+                </a:solidFill>
+                <a:latin typeface="Cambria"/>
+              </a:rPr>
+              <a:t>All 36 planted mule-ring transactions were detected.</a:t>
+            </a:r>
+          </a:p>
+        </p:txBody>
+      </p:sp>
+      <p:sp>
+        <p:nvSpPr>
+          <p:cNvPr id="5" name="Rounded Rectangle 4"/>
+          <p:cNvSpPr/>
+          <p:nvPr/>
+        </p:nvSpPr>
+        <p:spPr>
+          <a:xfrm>
+            <a:off x="6437376" y="1828800"/>
+            <a:ext cx="2743200" cy="2834640"/>
+          </a:xfrm>
+          <a:prstGeom prst="roundRect">
+            <a:avLst/>
+          </a:prstGeom>
+          <a:solidFill>
+            <a:srgbClr val="F4F6FA"/>
+          </a:solidFill>
+          <a:ln>
+            <a:solidFill>
+              <a:srgbClr val="C7D0DE"/>
+            </a:solidFill>
+          </a:ln>
+          <a:effectLst/>
+        </p:spPr>
+        <p:style>
+          <a:lnRef idx="1">
+            <a:schemeClr val="accent1"/>
+          </a:lnRef>
+          <a:fillRef idx="3">
+            <a:schemeClr val="accent1"/>
+          </a:fillRef>
+          <a:effectRef idx="2">
+            <a:schemeClr val="accent1"/>
+          </a:effectRef>
+          <a:fontRef idx="minor">
+            <a:schemeClr val="lt1"/>
+          </a:fontRef>
+        </p:style>
+        <p:txBody>
+          <a:bodyPr rtlCol="0" anchor="ctr" wrap="square" lIns="146304" rIns="128016" tIns="182880"/>
+          <a:lstStyle/>
+          <a:p>
+            <a:pPr algn="ctr">
+              <a:spcAft>
+                <a:spcPts val="800"/>
+              </a:spcAft>
+            </a:pPr>
+            <a:r>
+              <a:rPr sz="1400" b="1">
+                <a:solidFill>
+                  <a:srgbClr val="C62828"/>
+                </a:solidFill>
+                <a:latin typeface="Cambria"/>
+              </a:rPr>
+              <a:t>A finding worth reporting</a:t>
+            </a:r>
+          </a:p>
+          <a:p>
+            <a:pPr>
+              <a:spcAft>
+                <a:spcPts val="800"/>
+              </a:spcAft>
+            </a:pPr>
+            <a:r>
+              <a:rPr sz="1200" b="0">
+                <a:solidFill>
+                  <a:srgbClr val="222833"/>
+                </a:solidFill>
+                <a:latin typeface="Cambria"/>
+              </a:rPr>
+              <a:t>Nothing reaches the block threshold; every catch reaches an analyst.</a:t>
+            </a:r>
+          </a:p>
+        </p:txBody>
+      </p:sp>
+      <p:sp>
+        <p:nvSpPr>
+          <p:cNvPr id="6" name="Rounded Rectangle 5"/>
+          <p:cNvSpPr/>
+          <p:nvPr/>
+        </p:nvSpPr>
+        <p:spPr>
+          <a:xfrm>
+            <a:off x="9427464" y="1828800"/>
+            <a:ext cx="2743200" cy="2834640"/>
+          </a:xfrm>
+          <a:prstGeom prst="roundRect">
+            <a:avLst/>
+          </a:prstGeom>
+          <a:solidFill>
+            <a:srgbClr val="F4F6FA"/>
+          </a:solidFill>
+          <a:ln>
+            <a:solidFill>
+              <a:srgbClr val="C7D0DE"/>
+            </a:solidFill>
+          </a:ln>
+          <a:effectLst/>
+        </p:spPr>
+        <p:style>
+          <a:lnRef idx="1">
+            <a:schemeClr val="accent1"/>
+          </a:lnRef>
+          <a:fillRef idx="3">
+            <a:schemeClr val="accent1"/>
+          </a:fillRef>
+          <a:effectRef idx="2">
+            <a:schemeClr val="accent1"/>
+          </a:effectRef>
+          <a:fontRef idx="minor">
+            <a:schemeClr val="lt1"/>
+          </a:fontRef>
+        </p:style>
+        <p:txBody>
+          <a:bodyPr rtlCol="0" anchor="ctr" wrap="square" lIns="146304" rIns="128016" tIns="182880"/>
+          <a:lstStyle/>
+          <a:p>
+            <a:pPr algn="ctr">
+              <a:spcAft>
+                <a:spcPts val="800"/>
+              </a:spcAft>
+            </a:pPr>
+            <a:r>
+              <a:rPr sz="1400" b="1">
+                <a:solidFill>
+                  <a:srgbClr val="2E7D32"/>
+                </a:solidFill>
+                <a:latin typeface="Cambria"/>
+              </a:rPr>
+              <a:t>Engineering discipline</a:t>
+            </a:r>
+          </a:p>
+          <a:p>
+            <a:pPr>
+              <a:spcAft>
+                <a:spcPts val="800"/>
+              </a:spcAft>
+            </a:pPr>
+            <a:r>
+              <a:rPr sz="1200" b="0">
+                <a:solidFill>
+                  <a:srgbClr val="222833"/>
+                </a:solidFill>
+                <a:latin typeface="Cambria"/>
+              </a:rPr>
+              <a:t>27 automated tests, continuous integration, one-command deployment.</a:t>
+            </a:r>
+          </a:p>
+        </p:txBody>
+      </p:sp>
+    </p:spTree>
+  </p:cSld>
+  <p:clrMapOvr>
+    <a:masterClrMapping/>
+  </p:clrMapOvr>
+</p:sld>
+</file>
+
+<file path=ppt/slides/slide14.xml><?xml version="1.0" encoding="utf-8"?>
+<p:sld xmlns:a="http://schemas.openxmlformats.org/drawingml/2006/main" xmlns:p="http://schemas.openxmlformats.org/presentationml/2006/main" xmlns:r="http://schemas.openxmlformats.org/officeDocument/2006/relationships">
+  <p:cSld>
+    <p:spTree>
+      <p:nvGrpSpPr>
+        <p:cNvPr id="1" name=""/>
+        <p:cNvGrpSpPr/>
+        <p:nvPr/>
+      </p:nvGrpSpPr>
+      <p:grpSpPr/>
+      <p:sp>
+        <p:nvSpPr>
+          <p:cNvPr id="2" name="Title 1"/>
+          <p:cNvSpPr>
+            <a:spLocks noGrp="1"/>
+          </p:cNvSpPr>
+          <p:nvPr>
+            <p:ph type="title"/>
+          </p:nvPr>
+        </p:nvSpPr>
+        <p:spPr/>
+        <p:txBody>
+          <a:bodyPr/>
+          <a:lstStyle/>
+          <a:p>
+            <a:r>
+              <a:rPr sz="2800" b="1">
+                <a:solidFill>
+                  <a:srgbClr val="002060"/>
+                </a:solidFill>
+                <a:latin typeface="Cambria"/>
+              </a:rPr>
+              <a:t>References</a:t>
+            </a:r>
+          </a:p>
+        </p:txBody>
+      </p:sp>
+      <p:sp>
+        <p:nvSpPr>
+          <p:cNvPr id="3" name="Content Placeholder 2"/>
+          <p:cNvSpPr>
+            <a:spLocks noGrp="1"/>
+          </p:cNvSpPr>
+          <p:nvPr>
+            <p:ph idx="1"/>
+          </p:nvPr>
+        </p:nvSpPr>
+        <p:spPr/>
+        <p:txBody>
+          <a:bodyPr wrap="square"/>
+          <a:lstStyle/>
+          <a:p>
+            <a:pPr>
+              <a:spcAft>
+                <a:spcPts val="700"/>
+              </a:spcAft>
+            </a:pPr>
+            <a:r>
+              <a:rPr sz="1300" b="0">
+                <a:solidFill>
+                  <a:srgbClr val="222833"/>
+                </a:solidFill>
+                <a:latin typeface="Cambria"/>
+              </a:rPr>
+              <a:t>[1]  Van Vlasselaer, V. et al. (2015). APATE: A novel approach for automated credit card transaction fraud detection using network-based extensions. Decision Support Systems, 75, 38–48.</a:t>
+            </a:r>
+          </a:p>
+          <a:p>
+            <a:pPr>
+              <a:spcAft>
+                <a:spcPts val="700"/>
+              </a:spcAft>
+            </a:pPr>
+            <a:r>
+              <a:rPr sz="1300" b="0">
+                <a:solidFill>
+                  <a:srgbClr val="222833"/>
+                </a:solidFill>
+                <a:latin typeface="Cambria"/>
+              </a:rPr>
+              <a:t>[2]  FICO. Falcon Fraud Manager — product documentation. fico.com.</a:t>
+            </a:r>
+          </a:p>
+          <a:p>
+            <a:pPr>
+              <a:spcAft>
+                <a:spcPts val="700"/>
+              </a:spcAft>
+            </a:pPr>
+            <a:r>
+              <a:rPr sz="1300" b="0">
+                <a:solidFill>
+                  <a:srgbClr val="222833"/>
+                </a:solidFill>
+                <a:latin typeface="Cambria"/>
+              </a:rPr>
+              <a:t>[3]  Feedzai. RiskOps platform overview. feedzai.com.</a:t>
+            </a:r>
+          </a:p>
+          <a:p>
+            <a:pPr>
+              <a:spcAft>
+                <a:spcPts val="700"/>
+              </a:spcAft>
+            </a:pPr>
+            <a:r>
+              <a:rPr sz="1300" b="0">
+                <a:solidFill>
+                  <a:srgbClr val="222833"/>
+                </a:solidFill>
+                <a:latin typeface="Cambria"/>
+              </a:rPr>
+              <a:t>[4]  Featurespace. ARIC Risk Hub — adaptive behavioural analytics. featurespace.com.</a:t>
+            </a:r>
+          </a:p>
+          <a:p>
+            <a:pPr>
+              <a:spcAft>
+                <a:spcPts val="700"/>
+              </a:spcAft>
+            </a:pPr>
+            <a:r>
+              <a:rPr sz="1300" b="0">
+                <a:solidFill>
+                  <a:srgbClr val="222833"/>
+                </a:solidFill>
+                <a:latin typeface="Cambria"/>
+              </a:rPr>
+              <a:t>[5]  Neo4j. Graph algorithms for fraud detection — developer guide. neo4j.com.</a:t>
+            </a:r>
+          </a:p>
+          <a:p>
+            <a:pPr>
+              <a:spcAft>
+                <a:spcPts val="700"/>
+              </a:spcAft>
+            </a:pPr>
+            <a:r>
+              <a:rPr sz="1300" b="0">
+                <a:solidFill>
+                  <a:srgbClr val="222833"/>
+                </a:solidFill>
+                <a:latin typeface="Cambria"/>
+              </a:rPr>
+              <a:t>[6]  LangChain &amp; ChromaDB documentation — retrieval-augmented generation.</a:t>
+            </a:r>
+          </a:p>
+        </p:txBody>
+      </p:sp>
+    </p:spTree>
+  </p:cSld>
+  <p:clrMapOvr>
+    <a:masterClrMapping/>
+  </p:clrMapOvr>
+</p:sld>
+</file>
+
+<file path=ppt/slides/slide15.xml><?xml version="1.0" encoding="utf-8"?>
+<p:sld xmlns:a="http://schemas.openxmlformats.org/drawingml/2006/main" xmlns:p="http://schemas.openxmlformats.org/presentationml/2006/main" xmlns:r="http://schemas.openxmlformats.org/officeDocument/2006/relationships">
+  <p:cSld>
+    <p:spTree>
+      <p:nvGrpSpPr>
+        <p:cNvPr id="1" name=""/>
+        <p:cNvGrpSpPr/>
+        <p:nvPr/>
+      </p:nvGrpSpPr>
+      <p:grpSpPr/>
+      <p:sp>
+        <p:nvSpPr>
+          <p:cNvPr id="2" name="Title 1"/>
+          <p:cNvSpPr>
+            <a:spLocks noGrp="1"/>
+          </p:cNvSpPr>
+          <p:nvPr>
+            <p:ph type="title"/>
+          </p:nvPr>
+        </p:nvSpPr>
+        <p:spPr/>
+        <p:txBody>
+          <a:bodyPr/>
+          <a:lstStyle/>
+          <a:p>
+            <a:r>
+              <a:rPr sz="2800" b="1">
+                <a:solidFill>
+                  <a:srgbClr val="002060"/>
+                </a:solidFill>
+                <a:latin typeface="Cambria"/>
+              </a:rPr>
+              <a:t>Team Contributions</a:t>
+            </a:r>
+          </a:p>
+        </p:txBody>
+      </p:sp>
+      <p:sp>
+        <p:nvSpPr>
+          <p:cNvPr id="3" name="Rounded Rectangle 2"/>
+          <p:cNvSpPr/>
+          <p:nvPr/>
+        </p:nvSpPr>
+        <p:spPr>
+          <a:xfrm>
+            <a:off x="457200" y="1371600"/>
+            <a:ext cx="3703320" cy="4846320"/>
+          </a:xfrm>
+          <a:prstGeom prst="roundRect">
+            <a:avLst/>
+          </a:prstGeom>
+          <a:solidFill>
+            <a:srgbClr val="F4F6FA"/>
+          </a:solidFill>
+          <a:ln>
+            <a:solidFill>
+              <a:srgbClr val="C7D0DE"/>
+            </a:solidFill>
+          </a:ln>
+          <a:effectLst/>
+        </p:spPr>
+        <p:style>
+          <a:lnRef idx="1">
+            <a:schemeClr val="accent1"/>
+          </a:lnRef>
+          <a:fillRef idx="3">
+            <a:schemeClr val="accent1"/>
+          </a:fillRef>
+          <a:effectRef idx="2">
+            <a:schemeClr val="accent1"/>
+          </a:effectRef>
+          <a:fontRef idx="minor">
+            <a:schemeClr val="lt1"/>
+          </a:fontRef>
+        </p:style>
+        <p:txBody>
+          <a:bodyPr rtlCol="0" anchor="ctr"/>
+          <a:lstStyle/>
+          <a:p>
+            <a:pPr algn="ctr"/>
+          </a:p>
+        </p:txBody>
+      </p:sp>
+      <p:sp>
+        <p:nvSpPr>
+          <p:cNvPr id="4" name="Oval 3"/>
+          <p:cNvSpPr/>
+          <p:nvPr/>
+        </p:nvSpPr>
+        <p:spPr>
+          <a:xfrm>
+            <a:off x="1897380" y="1600200"/>
+            <a:ext cx="822960" cy="822960"/>
+          </a:xfrm>
+          <a:prstGeom prst="ellipse">
+            <a:avLst/>
+          </a:prstGeom>
+          <a:solidFill>
+            <a:srgbClr val="002060"/>
+          </a:solidFill>
+          <a:ln>
+            <a:noFill/>
+          </a:ln>
+        </p:spPr>
+        <p:style>
+          <a:lnRef idx="1">
+            <a:schemeClr val="accent1"/>
+          </a:lnRef>
+          <a:fillRef idx="3">
+            <a:schemeClr val="accent1"/>
+          </a:fillRef>
+          <a:effectRef idx="2">
+            <a:schemeClr val="accent1"/>
+          </a:effectRef>
+          <a:fontRef idx="minor">
+            <a:schemeClr val="lt1"/>
+          </a:fontRef>
+        </p:style>
+        <p:txBody>
+          <a:bodyPr rtlCol="0" anchor="ctr" lIns="0" rIns="0" tIns="0" bIns="0"/>
+          <a:lstStyle/>
+          <a:p>
+            <a:pPr algn="ctr"/>
+            <a:r>
+              <a:rPr sz="2000" b="1">
+                <a:solidFill>
+                  <a:srgbClr val="FFFFFF"/>
+                </a:solidFill>
+                <a:latin typeface="Cambria"/>
+              </a:rPr>
+              <a:t>JO</a:t>
+            </a:r>
+          </a:p>
+        </p:txBody>
+      </p:sp>
+      <p:sp>
+        <p:nvSpPr>
+          <p:cNvPr id="5" name="TextBox 4"/>
+          <p:cNvSpPr txBox="1"/>
+          <p:nvPr/>
+        </p:nvSpPr>
+        <p:spPr>
+          <a:xfrm>
+            <a:off x="685800" y="2514600"/>
+            <a:ext cx="3246120" cy="822960"/>
+          </a:xfrm>
+          <a:prstGeom prst="rect">
+            <a:avLst/>
+          </a:prstGeom>
+          <a:noFill/>
+        </p:spPr>
+        <p:txBody>
+          <a:bodyPr wrap="square">
+            <a:spAutoFit/>
+          </a:bodyPr>
+          <a:lstStyle/>
+          <a:p>
+            <a:pPr algn="ctr">
+              <a:spcAft>
+                <a:spcPts val="200"/>
+              </a:spcAft>
+            </a:pPr>
+            <a:r>
+              <a:rPr sz="1600" b="1">
+                <a:solidFill>
+                  <a:srgbClr val="002060"/>
+                </a:solidFill>
+                <a:latin typeface="Cambria"/>
+              </a:rPr>
+              <a:t>Joshi Om</a:t>
+            </a:r>
+          </a:p>
+          <a:p>
+            <a:pPr algn="ctr">
+              <a:spcAft>
+                <a:spcPts val="200"/>
+              </a:spcAft>
+            </a:pPr>
+            <a:r>
+              <a:rPr sz="1200" b="1">
+                <a:solidFill>
+                  <a:srgbClr val="002060"/>
+                </a:solidFill>
+                <a:latin typeface="Cambria"/>
+              </a:rPr>
+              <a:t>24DCE052  ·  Platform &amp; Documentation</a:t>
+            </a:r>
+          </a:p>
+        </p:txBody>
+      </p:sp>
+      <p:sp>
+        <p:nvSpPr>
+          <p:cNvPr id="6" name="TextBox 5"/>
+          <p:cNvSpPr txBox="1"/>
+          <p:nvPr/>
+        </p:nvSpPr>
+        <p:spPr>
+          <a:xfrm>
+            <a:off x="713232" y="3429000"/>
+            <a:ext cx="3200400" cy="2651760"/>
+          </a:xfrm>
+          <a:prstGeom prst="rect">
+            <a:avLst/>
+          </a:prstGeom>
+          <a:noFill/>
+        </p:spPr>
+        <p:txBody>
+          <a:bodyPr wrap="square">
+            <a:spAutoFit/>
+          </a:bodyPr>
+          <a:lstStyle/>
+          <a:p>
+            <a:pPr>
+              <a:spcAft>
+                <a:spcPts val="800"/>
+              </a:spcAft>
+            </a:pPr>
+            <a:r>
+              <a:rPr sz="1150">
+                <a:solidFill>
+                  <a:srgbClr val="222833"/>
+                </a:solidFill>
+                <a:latin typeface="Cambria"/>
+              </a:rPr>
+              <a:t>•  FastAPI gateway, MongoDB/Beanie schema, Redis caching and rate limiting</a:t>
+            </a:r>
+          </a:p>
+          <a:p>
+            <a:pPr>
+              <a:spcAft>
+                <a:spcPts val="800"/>
+              </a:spcAft>
+            </a:pPr>
+            <a:r>
+              <a:rPr sz="1150">
+                <a:solidFill>
+                  <a:srgbClr val="222833"/>
+                </a:solidFill>
+                <a:latin typeface="Cambria"/>
+              </a:rPr>
+              <a:t>•  Rule Engine — velocity, amount, blacklist, merchant, risk-tier checks</a:t>
+            </a:r>
+          </a:p>
+          <a:p>
+            <a:pPr>
+              <a:spcAft>
+                <a:spcPts val="800"/>
+              </a:spcAft>
+            </a:pPr>
+            <a:r>
+              <a:rPr sz="1150">
+                <a:solidFill>
+                  <a:srgbClr val="222833"/>
+                </a:solidFill>
+                <a:latin typeface="Cambria"/>
+              </a:rPr>
+              <a:t>•  Docker Compose stack for all five services</a:t>
+            </a:r>
+          </a:p>
+          <a:p>
+            <a:pPr>
+              <a:spcAft>
+                <a:spcPts val="800"/>
+              </a:spcAft>
+            </a:pPr>
+            <a:r>
+              <a:rPr sz="1150">
+                <a:solidFill>
+                  <a:srgbClr val="222833"/>
+                </a:solidFill>
+                <a:latin typeface="Cambria"/>
+              </a:rPr>
+              <a:t>•  SRS requirements and database design; verified every schema table against the running code</a:t>
+            </a:r>
+          </a:p>
+        </p:txBody>
+      </p:sp>
+      <p:sp>
+        <p:nvSpPr>
+          <p:cNvPr id="7" name="Rounded Rectangle 6"/>
+          <p:cNvSpPr/>
+          <p:nvPr/>
+        </p:nvSpPr>
+        <p:spPr>
+          <a:xfrm>
+            <a:off x="4343400" y="1371600"/>
+            <a:ext cx="3703320" cy="4846320"/>
+          </a:xfrm>
+          <a:prstGeom prst="roundRect">
+            <a:avLst/>
+          </a:prstGeom>
+          <a:solidFill>
+            <a:srgbClr val="F4F6FA"/>
+          </a:solidFill>
+          <a:ln>
+            <a:solidFill>
+              <a:srgbClr val="C7D0DE"/>
+            </a:solidFill>
+          </a:ln>
+          <a:effectLst/>
+        </p:spPr>
+        <p:style>
+          <a:lnRef idx="1">
+            <a:schemeClr val="accent1"/>
+          </a:lnRef>
+          <a:fillRef idx="3">
+            <a:schemeClr val="accent1"/>
+          </a:fillRef>
+          <a:effectRef idx="2">
+            <a:schemeClr val="accent1"/>
+          </a:effectRef>
+          <a:fontRef idx="minor">
+            <a:schemeClr val="lt1"/>
+          </a:fontRef>
+        </p:style>
+        <p:txBody>
+          <a:bodyPr rtlCol="0" anchor="ctr"/>
+          <a:lstStyle/>
+          <a:p>
+            <a:pPr algn="ctr"/>
+          </a:p>
+        </p:txBody>
+      </p:sp>
+      <p:sp>
+        <p:nvSpPr>
+          <p:cNvPr id="8" name="Oval 7"/>
+          <p:cNvSpPr/>
+          <p:nvPr/>
+        </p:nvSpPr>
+        <p:spPr>
+          <a:xfrm>
+            <a:off x="5783580" y="1600200"/>
+            <a:ext cx="822960" cy="822960"/>
+          </a:xfrm>
+          <a:prstGeom prst="ellipse">
+            <a:avLst/>
+          </a:prstGeom>
+          <a:solidFill>
+            <a:srgbClr val="028090"/>
+          </a:solidFill>
+          <a:ln>
+            <a:noFill/>
+          </a:ln>
+        </p:spPr>
+        <p:style>
+          <a:lnRef idx="1">
+            <a:schemeClr val="accent1"/>
+          </a:lnRef>
+          <a:fillRef idx="3">
+            <a:schemeClr val="accent1"/>
+          </a:fillRef>
+          <a:effectRef idx="2">
+            <a:schemeClr val="accent1"/>
+          </a:effectRef>
+          <a:fontRef idx="minor">
+            <a:schemeClr val="lt1"/>
+          </a:fontRef>
+        </p:style>
+        <p:txBody>
+          <a:bodyPr rtlCol="0" anchor="ctr" lIns="0" rIns="0" tIns="0" bIns="0"/>
+          <a:lstStyle/>
+          <a:p>
+            <a:pPr algn="ctr"/>
+            <a:r>
+              <a:rPr sz="2000" b="1">
+                <a:solidFill>
+                  <a:srgbClr val="FFFFFF"/>
+                </a:solidFill>
+                <a:latin typeface="Cambria"/>
+              </a:rPr>
+              <a:t>KG</a:t>
+            </a:r>
+          </a:p>
+        </p:txBody>
+      </p:sp>
+      <p:sp>
+        <p:nvSpPr>
+          <p:cNvPr id="9" name="TextBox 8"/>
+          <p:cNvSpPr txBox="1"/>
+          <p:nvPr/>
+        </p:nvSpPr>
+        <p:spPr>
+          <a:xfrm>
+            <a:off x="4572000" y="2514600"/>
+            <a:ext cx="3246120" cy="822960"/>
+          </a:xfrm>
+          <a:prstGeom prst="rect">
+            <a:avLst/>
+          </a:prstGeom>
+          <a:noFill/>
+        </p:spPr>
+        <p:txBody>
+          <a:bodyPr wrap="square">
+            <a:spAutoFit/>
+          </a:bodyPr>
+          <a:lstStyle/>
+          <a:p>
+            <a:pPr algn="ctr">
+              <a:spcAft>
+                <a:spcPts val="200"/>
+              </a:spcAft>
+            </a:pPr>
+            <a:r>
+              <a:rPr sz="1600" b="1">
+                <a:solidFill>
+                  <a:srgbClr val="002060"/>
+                </a:solidFill>
+                <a:latin typeface="Cambria"/>
+              </a:rPr>
+              <a:t>Krish Gajera</a:t>
+            </a:r>
+          </a:p>
+          <a:p>
+            <a:pPr algn="ctr">
+              <a:spcAft>
+                <a:spcPts val="200"/>
+              </a:spcAft>
+            </a:pPr>
+            <a:r>
+              <a:rPr sz="1200" b="1">
+                <a:solidFill>
+                  <a:srgbClr val="028090"/>
+                </a:solidFill>
+                <a:latin typeface="Cambria"/>
+              </a:rPr>
+              <a:t>24DCE040  ·  Graph &amp; Fraud Detection</a:t>
+            </a:r>
+          </a:p>
+        </p:txBody>
+      </p:sp>
+      <p:sp>
+        <p:nvSpPr>
+          <p:cNvPr id="10" name="TextBox 9"/>
+          <p:cNvSpPr txBox="1"/>
+          <p:nvPr/>
+        </p:nvSpPr>
+        <p:spPr>
+          <a:xfrm>
+            <a:off x="4599432" y="3429000"/>
+            <a:ext cx="3200400" cy="2651760"/>
+          </a:xfrm>
+          <a:prstGeom prst="rect">
+            <a:avLst/>
+          </a:prstGeom>
+          <a:noFill/>
+        </p:spPr>
+        <p:txBody>
+          <a:bodyPr wrap="square">
+            <a:spAutoFit/>
+          </a:bodyPr>
+          <a:lstStyle/>
+          <a:p>
+            <a:pPr>
+              <a:spcAft>
+                <a:spcPts val="800"/>
+              </a:spcAft>
+            </a:pPr>
+            <a:r>
+              <a:rPr sz="1150">
+                <a:solidFill>
+                  <a:srgbClr val="222833"/>
+                </a:solidFill>
+                <a:latin typeface="Cambria"/>
+              </a:rPr>
+              <a:t>•  Neo4j schema and Cypher queries for rings, circular flow, fee-skimming</a:t>
+            </a:r>
+          </a:p>
+          <a:p>
+            <a:pPr>
+              <a:spcAft>
+                <a:spcPts val="800"/>
+              </a:spcAft>
+            </a:pPr>
+            <a:r>
+              <a:rPr sz="1150">
+                <a:solidFill>
+                  <a:srgbClr val="222833"/>
+                </a:solidFill>
+                <a:latin typeface="Cambria"/>
+              </a:rPr>
+              <a:t>•  Graph Analyzer — shared device/IP clustering, fraud-label propagation</a:t>
+            </a:r>
+          </a:p>
+          <a:p>
+            <a:pPr>
+              <a:spcAft>
+                <a:spcPts val="800"/>
+              </a:spcAft>
+            </a:pPr>
+            <a:r>
+              <a:rPr sz="1150">
+                <a:solidFill>
+                  <a:srgbClr val="222833"/>
+                </a:solidFill>
+                <a:latin typeface="Cambria"/>
+              </a:rPr>
+              <a:t>•  Synthetic fraud dataset generator — 500 accounts, 3 planted mule rings</a:t>
+            </a:r>
+          </a:p>
+          <a:p>
+            <a:pPr>
+              <a:spcAft>
+                <a:spcPts val="800"/>
+              </a:spcAft>
+            </a:pPr>
+            <a:r>
+              <a:rPr sz="1150">
+                <a:solidFill>
+                  <a:srgbClr val="222833"/>
+                </a:solidFill>
+                <a:latin typeface="Cambria"/>
+              </a:rPr>
+              <a:t>•  UML and DFD diagram set for the specification</a:t>
+            </a:r>
+          </a:p>
+        </p:txBody>
+      </p:sp>
+      <p:sp>
+        <p:nvSpPr>
+          <p:cNvPr id="11" name="Rounded Rectangle 10"/>
+          <p:cNvSpPr/>
+          <p:nvPr/>
+        </p:nvSpPr>
+        <p:spPr>
+          <a:xfrm>
+            <a:off x="8229600" y="1371600"/>
+            <a:ext cx="3703320" cy="4846320"/>
+          </a:xfrm>
+          <a:prstGeom prst="roundRect">
+            <a:avLst/>
+          </a:prstGeom>
+          <a:solidFill>
+            <a:srgbClr val="F4F6FA"/>
+          </a:solidFill>
+          <a:ln>
+            <a:solidFill>
+              <a:srgbClr val="C7D0DE"/>
+            </a:solidFill>
+          </a:ln>
+          <a:effectLst/>
+        </p:spPr>
+        <p:style>
+          <a:lnRef idx="1">
+            <a:schemeClr val="accent1"/>
+          </a:lnRef>
+          <a:fillRef idx="3">
+            <a:schemeClr val="accent1"/>
+          </a:fillRef>
+          <a:effectRef idx="2">
+            <a:schemeClr val="accent1"/>
+          </a:effectRef>
+          <a:fontRef idx="minor">
+            <a:schemeClr val="lt1"/>
+          </a:fontRef>
+        </p:style>
+        <p:txBody>
+          <a:bodyPr rtlCol="0" anchor="ctr"/>
+          <a:lstStyle/>
+          <a:p>
+            <a:pPr algn="ctr"/>
+          </a:p>
+        </p:txBody>
+      </p:sp>
+      <p:sp>
+        <p:nvSpPr>
+          <p:cNvPr id="12" name="Oval 11"/>
+          <p:cNvSpPr/>
+          <p:nvPr/>
+        </p:nvSpPr>
+        <p:spPr>
+          <a:xfrm>
+            <a:off x="9669780" y="1600200"/>
+            <a:ext cx="822960" cy="822960"/>
+          </a:xfrm>
+          <a:prstGeom prst="ellipse">
+            <a:avLst/>
+          </a:prstGeom>
+          <a:solidFill>
+            <a:srgbClr val="5B3A8E"/>
+          </a:solidFill>
+          <a:ln>
+            <a:noFill/>
+          </a:ln>
+        </p:spPr>
+        <p:style>
+          <a:lnRef idx="1">
+            <a:schemeClr val="accent1"/>
+          </a:lnRef>
+          <a:fillRef idx="3">
+            <a:schemeClr val="accent1"/>
+          </a:fillRef>
+          <a:effectRef idx="2">
+            <a:schemeClr val="accent1"/>
+          </a:effectRef>
+          <a:fontRef idx="minor">
+            <a:schemeClr val="lt1"/>
+          </a:fontRef>
+        </p:style>
+        <p:txBody>
+          <a:bodyPr rtlCol="0" anchor="ctr" lIns="0" rIns="0" tIns="0" bIns="0"/>
+          <a:lstStyle/>
+          <a:p>
+            <a:pPr algn="ctr"/>
+            <a:r>
+              <a:rPr sz="2000" b="1">
+                <a:solidFill>
+                  <a:srgbClr val="FFFFFF"/>
+                </a:solidFill>
+                <a:latin typeface="Cambria"/>
+              </a:rPr>
+              <a:t>DD</a:t>
+            </a:r>
+          </a:p>
+        </p:txBody>
+      </p:sp>
+      <p:sp>
+        <p:nvSpPr>
+          <p:cNvPr id="13" name="TextBox 12"/>
+          <p:cNvSpPr txBox="1"/>
+          <p:nvPr/>
+        </p:nvSpPr>
+        <p:spPr>
+          <a:xfrm>
+            <a:off x="8458200" y="2514600"/>
+            <a:ext cx="3246120" cy="822960"/>
+          </a:xfrm>
+          <a:prstGeom prst="rect">
+            <a:avLst/>
+          </a:prstGeom>
+          <a:noFill/>
+        </p:spPr>
+        <p:txBody>
+          <a:bodyPr wrap="square">
+            <a:spAutoFit/>
+          </a:bodyPr>
+          <a:lstStyle/>
+          <a:p>
+            <a:pPr algn="ctr">
+              <a:spcAft>
+                <a:spcPts val="200"/>
+              </a:spcAft>
+            </a:pPr>
+            <a:r>
+              <a:rPr sz="1600" b="1">
+                <a:solidFill>
+                  <a:srgbClr val="002060"/>
+                </a:solidFill>
+                <a:latin typeface="Cambria"/>
+              </a:rPr>
+              <a:t>Drashti Dedaniya</a:t>
+            </a:r>
+          </a:p>
+          <a:p>
+            <a:pPr algn="ctr">
+              <a:spcAft>
+                <a:spcPts val="200"/>
+              </a:spcAft>
+            </a:pPr>
+            <a:r>
+              <a:rPr sz="1200" b="1">
+                <a:solidFill>
+                  <a:srgbClr val="5B3A8E"/>
+                </a:solidFill>
+                <a:latin typeface="Cambria"/>
+              </a:rPr>
+              <a:t>24DCE029  ·  AI &amp; Dashboard</a:t>
+            </a:r>
+          </a:p>
+        </p:txBody>
+      </p:sp>
+      <p:sp>
+        <p:nvSpPr>
+          <p:cNvPr id="14" name="TextBox 13"/>
+          <p:cNvSpPr txBox="1"/>
+          <p:nvPr/>
+        </p:nvSpPr>
+        <p:spPr>
+          <a:xfrm>
+            <a:off x="8485632" y="3429000"/>
+            <a:ext cx="3200400" cy="2651760"/>
+          </a:xfrm>
+          <a:prstGeom prst="rect">
+            <a:avLst/>
+          </a:prstGeom>
+          <a:noFill/>
+        </p:spPr>
+        <p:txBody>
+          <a:bodyPr wrap="square">
+            <a:spAutoFit/>
+          </a:bodyPr>
+          <a:lstStyle/>
+          <a:p>
+            <a:pPr>
+              <a:spcAft>
+                <a:spcPts val="800"/>
+              </a:spcAft>
+            </a:pPr>
+            <a:r>
+              <a:rPr sz="1150">
+                <a:solidFill>
+                  <a:srgbClr val="222833"/>
+                </a:solidFill>
+                <a:latin typeface="Cambria"/>
+              </a:rPr>
+              <a:t>•  LangChain RAG pipeline, ChromaDB knowledge base, prompt engineering</a:t>
+            </a:r>
+          </a:p>
+          <a:p>
+            <a:pPr>
+              <a:spcAft>
+                <a:spcPts val="800"/>
+              </a:spcAft>
+            </a:pPr>
+            <a:r>
+              <a:rPr sz="1150">
+                <a:solidFill>
+                  <a:srgbClr val="222833"/>
+                </a:solidFill>
+                <a:latin typeface="Cambria"/>
+              </a:rPr>
+              <a:t>•  Decision Engine — score aggregation and threshold mapping</a:t>
+            </a:r>
+          </a:p>
+          <a:p>
+            <a:pPr>
+              <a:spcAft>
+                <a:spcPts val="800"/>
+              </a:spcAft>
+            </a:pPr>
+            <a:r>
+              <a:rPr sz="1150">
+                <a:solidFill>
+                  <a:srgbClr val="222833"/>
+                </a:solidFill>
+                <a:latin typeface="Cambria"/>
+              </a:rPr>
+              <a:t>•  React dashboard — charts, interactive table, motion, demo mode</a:t>
+            </a:r>
+          </a:p>
+          <a:p>
+            <a:pPr>
+              <a:spcAft>
+                <a:spcPts val="800"/>
+              </a:spcAft>
+            </a:pPr>
+            <a:r>
+              <a:rPr sz="1150">
+                <a:solidFill>
+                  <a:srgbClr val="222833"/>
+                </a:solidFill>
+                <a:latin typeface="Cambria"/>
+              </a:rPr>
+              <a:t>•  Review-2 deck and the standalone speaking script</a:t>
+            </a:r>
+          </a:p>
+        </p:txBody>
+      </p:sp>
+    </p:spTree>
+  </p:cSld>
+  <p:clrMapOvr>
+    <a:masterClrMapping/>
+  </p:clrMapOvr>
+</p:sld>
+</file>
+
+<file path=ppt/slides/slide16.xml><?xml version="1.0" encoding="utf-8"?>
+<p:sld xmlns:a="http://schemas.openxmlformats.org/drawingml/2006/main" xmlns:p="http://schemas.openxmlformats.org/presentationml/2006/main" xmlns:r="http://schemas.openxmlformats.org/officeDocument/2006/relationships">
+  <p:cSld>
+    <p:spTree>
+      <p:nvGrpSpPr>
+        <p:cNvPr id="1" name=""/>
+        <p:cNvGrpSpPr/>
+        <p:nvPr/>
+      </p:nvGrpSpPr>
+      <p:grpSpPr/>
+      <p:sp>
+        <p:nvSpPr>
+          <p:cNvPr id="2" name="Title 1"/>
+          <p:cNvSpPr>
+            <a:spLocks noGrp="1"/>
+          </p:cNvSpPr>
+          <p:nvPr>
+            <p:ph type="title"/>
+          </p:nvPr>
+        </p:nvSpPr>
+        <p:spPr/>
+        <p:txBody>
+          <a:bodyPr/>
+          <a:lstStyle/>
+          <a:p>
+            <a:r>
+              <a:rPr sz="2800" b="1">
+                <a:solidFill>
+                  <a:srgbClr val="002060"/>
+                </a:solidFill>
+                <a:latin typeface="Cambria"/>
+              </a:rPr>
+              <a:t/>
+            </a:r>
+          </a:p>
+        </p:txBody>
+      </p:sp>
+      <p:sp>
+        <p:nvSpPr>
+          <p:cNvPr id="3" name="TextBox 2"/>
+          <p:cNvSpPr txBox="1"/>
+          <p:nvPr/>
+        </p:nvSpPr>
+        <p:spPr>
+          <a:xfrm>
+            <a:off x="1371600" y="2377440"/>
+            <a:ext cx="9418320" cy="2011680"/>
+          </a:xfrm>
+          <a:prstGeom prst="rect">
+            <a:avLst/>
+          </a:prstGeom>
+          <a:noFill/>
+        </p:spPr>
+        <p:txBody>
+          <a:bodyPr wrap="square" lIns="73152" rIns="73152" anchor="ctr">
+            <a:spAutoFit/>
+          </a:bodyPr>
+          <a:lstStyle/>
+          <a:p>
+            <a:pPr algn="ctr">
+              <a:spcAft>
+                <a:spcPts val="1000"/>
+              </a:spcAft>
+            </a:pPr>
+            <a:r>
+              <a:rPr sz="4800" b="1">
+                <a:solidFill>
+                  <a:srgbClr val="002060"/>
+                </a:solidFill>
+                <a:latin typeface="Cambria"/>
+              </a:rPr>
+              <a:t>Thank You</a:t>
+            </a:r>
+          </a:p>
+          <a:p>
+            <a:pPr algn="ctr">
+              <a:spcAft>
+                <a:spcPts val="400"/>
+              </a:spcAft>
+            </a:pPr>
+            <a:r>
+              <a:rPr sz="2000" b="0">
+                <a:solidFill>
+                  <a:srgbClr val="555B66"/>
+                </a:solidFill>
+                <a:latin typeface="Cambria"/>
+              </a:rPr>
+              <a:t>Questions · Suggestions · Comments</a:t>
+            </a:r>
+          </a:p>
+          <a:p>
+            <a:pPr algn="ctr">
+              <a:spcAft>
+                <a:spcPts val="400"/>
+              </a:spcAft>
+            </a:pPr>
+            <a:r>
+              <a:rPr sz="1400" b="0">
+                <a:solidFill>
+                  <a:srgbClr val="222833"/>
+                </a:solidFill>
+                <a:latin typeface="Cambria"/>
+              </a:rPr>
+              <a:t>Joshi Om · Krish Gajera · Drashti Dedaniya  —  CHARUSAT · DEPSTAR</a:t>
+            </a:r>
+          </a:p>
+        </p:txBody>
+      </p:sp>
+    </p:spTree>
+  </p:cSld>
+  <p:clrMapOvr>
+    <a:masterClrMapping/>
+  </p:clrMapOvr>
+</p:sld>
+</file>
+
 <file path=ppt/slides/slide2.xml><?xml version="1.0" encoding="utf-8"?>
 <p:sld xmlns:a="http://schemas.openxmlformats.org/drawingml/2006/main" xmlns:r="http://schemas.openxmlformats.org/officeDocument/2006/relationships" xmlns:p="http://schemas.openxmlformats.org/presentationml/2006/main">
   <p:cSld>
@@ -6663,6 +7683,17 @@
                 <a:latin typeface="Cambria"/>
               </a:rPr>
               <a:t>9.  References</a:t>
+            </a:r>
+          </a:p>
+          <a:p>
+            <a:r>
+              <a:rPr sz="2000" b="0">
+                <a:solidFill>
+                  <a:srgbClr val="222833"/>
+                </a:solidFill>
+                <a:latin typeface="Cambria"/>
+              </a:rPr>
+              <a:t>10.  Team Contributions</a:t>
             </a:r>
           </a:p>
         </p:txBody>
